--- a/docs/slides/leroy-merlin-smart-hub.pptx
+++ b/docs/slides/leroy-merlin-smart-hub.pptx
@@ -5604,7 +5604,7 @@
                 <a:ea typeface="Cambria" pitchFamily="34" charset="-122"/>
                 <a:cs typeface="Cambria" pitchFamily="34" charset="-120"/>
               </a:rPr>
-              <a:t>Equipe</a:t>
+              <a:t>Autor</a:t>
             </a:r>
             <a:endParaRPr lang="en-US" sz="3200" dirty="0"/>
           </a:p>
@@ -5618,12 +5618,12 @@
         </p:nvSpPr>
         <p:spPr>
           <a:xfrm>
-            <a:off x="640080" y="1691640"/>
-            <a:ext cx="2606040" cy="3291840"/>
+            <a:off x="3259836" y="1737360"/>
+            <a:ext cx="5669280" cy="3200400"/>
           </a:xfrm>
           <a:prstGeom prst="roundRect">
             <a:avLst>
-              <a:gd name="adj" fmla="val 3509"/>
+              <a:gd name="adj" fmla="val 2857"/>
             </a:avLst>
           </a:prstGeom>
           <a:solidFill>
@@ -5645,8 +5645,8 @@
         </p:nvSpPr>
         <p:spPr>
           <a:xfrm>
-            <a:off x="1348740" y="2011680"/>
-            <a:ext cx="1188720" cy="1188720"/>
+            <a:off x="5271516" y="2148840"/>
+            <a:ext cx="1645920" cy="1645920"/>
           </a:xfrm>
           <a:prstGeom prst="ellipse">
             <a:avLst/>
@@ -5665,8 +5665,8 @@
         </p:nvSpPr>
         <p:spPr>
           <a:xfrm>
-            <a:off x="1348740" y="2011680"/>
-            <a:ext cx="1188720" cy="1188720"/>
+            <a:off x="5271516" y="2148840"/>
+            <a:ext cx="1645920" cy="1645920"/>
           </a:xfrm>
           <a:prstGeom prst="rect">
             <a:avLst/>
@@ -5682,7 +5682,7 @@
               <a:buNone/>
             </a:pPr>
             <a:r>
-              <a:rPr lang="en-US" sz="2600" b="1" dirty="0">
+              <a:rPr lang="en-US" sz="3400" b="1" dirty="0">
                 <a:solidFill>
                   <a:srgbClr val="FFFFFF"/>
                 </a:solidFill>
@@ -5692,7 +5692,7 @@
               </a:rPr>
               <a:t>LM</a:t>
             </a:r>
-            <a:endParaRPr lang="en-US" sz="2600" dirty="0"/>
+            <a:endParaRPr lang="en-US" sz="3400" dirty="0"/>
           </a:p>
         </p:txBody>
       </p:sp>
@@ -5704,8 +5704,8 @@
         </p:nvSpPr>
         <p:spPr>
           <a:xfrm>
-            <a:off x="777240" y="3383280"/>
-            <a:ext cx="2331720" cy="548640"/>
+            <a:off x="3442716" y="3931920"/>
+            <a:ext cx="5303520" cy="457200"/>
           </a:xfrm>
           <a:prstGeom prst="rect">
             <a:avLst/>
@@ -5721,17 +5721,17 @@
               <a:buNone/>
             </a:pPr>
             <a:r>
-              <a:rPr lang="en-US" sz="1400" b="1" dirty="0">
+              <a:rPr lang="en-US" sz="2000" b="1" dirty="0">
                 <a:solidFill>
                   <a:srgbClr val="14532D"/>
                 </a:solidFill>
-                <a:latin typeface="Calibri" pitchFamily="34" charset="0"/>
-                <a:ea typeface="Calibri" pitchFamily="34" charset="-122"/>
-                <a:cs typeface="Calibri" pitchFamily="34" charset="-120"/>
+                <a:latin typeface="Cambria" pitchFamily="34" charset="0"/>
+                <a:ea typeface="Cambria" pitchFamily="34" charset="-122"/>
+                <a:cs typeface="Cambria" pitchFamily="34" charset="-120"/>
               </a:rPr>
               <a:t>Leonardo Marsiarelli</a:t>
             </a:r>
-            <a:endParaRPr lang="en-US" sz="1400" dirty="0"/>
+            <a:endParaRPr lang="en-US" sz="2000" dirty="0"/>
           </a:p>
         </p:txBody>
       </p:sp>
@@ -5743,8 +5743,8 @@
         </p:nvSpPr>
         <p:spPr>
           <a:xfrm>
-            <a:off x="777240" y="3931920"/>
-            <a:ext cx="2331720" cy="822960"/>
+            <a:off x="3442716" y="4389120"/>
+            <a:ext cx="5303520" cy="457200"/>
           </a:xfrm>
           <a:prstGeom prst="rect">
             <a:avLst/>
@@ -5760,7 +5760,7 @@
               <a:buNone/>
             </a:pPr>
             <a:r>
-              <a:rPr lang="en-US" sz="1250" dirty="0">
+              <a:rPr lang="en-US" sz="1500" dirty="0">
                 <a:solidFill>
                   <a:srgbClr val="5B665E"/>
                 </a:solidFill>
@@ -5768,575 +5768,15 @@
                 <a:ea typeface="Calibri" pitchFamily="34" charset="-122"/>
                 <a:cs typeface="Calibri" pitchFamily="34" charset="-120"/>
               </a:rPr>
-              <a:t>RM 555366</a:t>
-            </a:r>
-            <a:endParaRPr lang="en-US" sz="1250" dirty="0"/>
-          </a:p>
-          <a:p>
-            <a:pPr algn="ctr" indent="0" marL="0">
-              <a:buNone/>
-            </a:pPr>
-            <a:r>
-              <a:rPr lang="en-US" sz="1250" dirty="0">
-                <a:solidFill>
-                  <a:srgbClr val="5B665E"/>
-                </a:solidFill>
-                <a:latin typeface="Calibri" pitchFamily="34" charset="0"/>
-                <a:ea typeface="Calibri" pitchFamily="34" charset="-122"/>
-                <a:cs typeface="Calibri" pitchFamily="34" charset="-120"/>
-              </a:rPr>
-              <a:t>3SIOA</a:t>
-            </a:r>
-            <a:endParaRPr lang="en-US" sz="1250" dirty="0"/>
+              <a:t>RM 555366  ·  Turma 3SIOA</a:t>
+            </a:r>
+            <a:endParaRPr lang="en-US" sz="1500" dirty="0"/>
           </a:p>
         </p:txBody>
       </p:sp>
       <p:sp>
         <p:nvSpPr>
           <p:cNvPr id="8" name="Shape 6"/>
-          <p:cNvSpPr/>
-          <p:nvPr/>
-        </p:nvSpPr>
-        <p:spPr>
-          <a:xfrm>
-            <a:off x="3474720" y="1691640"/>
-            <a:ext cx="2606040" cy="3291840"/>
-          </a:xfrm>
-          <a:prstGeom prst="roundRect">
-            <a:avLst>
-              <a:gd name="adj" fmla="val 3509"/>
-            </a:avLst>
-          </a:prstGeom>
-          <a:solidFill>
-            <a:srgbClr val="F7F7F7"/>
-          </a:solidFill>
-          <a:ln w="12700">
-            <a:solidFill>
-              <a:srgbClr val="D9D9D9"/>
-            </a:solidFill>
-            <a:prstDash val="solid"/>
-          </a:ln>
-        </p:spPr>
-      </p:sp>
-      <p:sp>
-        <p:nvSpPr>
-          <p:cNvPr id="9" name="Shape 7"/>
-          <p:cNvSpPr/>
-          <p:nvPr/>
-        </p:nvSpPr>
-        <p:spPr>
-          <a:xfrm>
-            <a:off x="4183380" y="2011680"/>
-            <a:ext cx="1188720" cy="1188720"/>
-          </a:xfrm>
-          <a:prstGeom prst="ellipse">
-            <a:avLst/>
-          </a:prstGeom>
-          <a:solidFill>
-            <a:srgbClr val="D9D9D9"/>
-          </a:solidFill>
-          <a:ln/>
-        </p:spPr>
-      </p:sp>
-      <p:sp>
-        <p:nvSpPr>
-          <p:cNvPr id="10" name="Text 8"/>
-          <p:cNvSpPr txBox="1"/>
-          <p:nvPr/>
-        </p:nvSpPr>
-        <p:spPr>
-          <a:xfrm>
-            <a:off x="4183380" y="2011680"/>
-            <a:ext cx="1188720" cy="1188720"/>
-          </a:xfrm>
-          <a:prstGeom prst="rect">
-            <a:avLst/>
-          </a:prstGeom>
-          <a:noFill/>
-          <a:ln/>
-        </p:spPr>
-        <p:txBody>
-          <a:bodyPr wrap="square" lIns="0" tIns="0" rIns="0" bIns="0" rtlCol="0" anchor="ctr"/>
-          <a:lstStyle/>
-          <a:p>
-            <a:pPr algn="ctr" indent="0" marL="0">
-              <a:buNone/>
-            </a:pPr>
-            <a:r>
-              <a:rPr lang="en-US" sz="2600" b="1" dirty="0">
-                <a:solidFill>
-                  <a:srgbClr val="FFFFFF"/>
-                </a:solidFill>
-                <a:latin typeface="Calibri" pitchFamily="34" charset="0"/>
-                <a:ea typeface="Calibri" pitchFamily="34" charset="-122"/>
-                <a:cs typeface="Calibri" pitchFamily="34" charset="-120"/>
-              </a:rPr>
-              <a:t>?</a:t>
-            </a:r>
-            <a:endParaRPr lang="en-US" sz="2600" dirty="0"/>
-          </a:p>
-        </p:txBody>
-      </p:sp>
-      <p:sp>
-        <p:nvSpPr>
-          <p:cNvPr id="11" name="Text 9"/>
-          <p:cNvSpPr txBox="1"/>
-          <p:nvPr/>
-        </p:nvSpPr>
-        <p:spPr>
-          <a:xfrm>
-            <a:off x="3611880" y="3383280"/>
-            <a:ext cx="2331720" cy="548640"/>
-          </a:xfrm>
-          <a:prstGeom prst="rect">
-            <a:avLst/>
-          </a:prstGeom>
-          <a:noFill/>
-          <a:ln/>
-        </p:spPr>
-        <p:txBody>
-          <a:bodyPr wrap="square" lIns="0" tIns="0" rIns="0" bIns="0" rtlCol="0" anchor="ctr"/>
-          <a:lstStyle/>
-          <a:p>
-            <a:pPr algn="ctr" indent="0" marL="0">
-              <a:buNone/>
-            </a:pPr>
-            <a:r>
-              <a:rPr lang="en-US" sz="1400" b="1" dirty="0">
-                <a:solidFill>
-                  <a:srgbClr val="5B665E"/>
-                </a:solidFill>
-                <a:latin typeface="Calibri" pitchFamily="34" charset="0"/>
-                <a:ea typeface="Calibri" pitchFamily="34" charset="-122"/>
-                <a:cs typeface="Calibri" pitchFamily="34" charset="-120"/>
-              </a:rPr>
-              <a:t>[Nome completo]</a:t>
-            </a:r>
-            <a:endParaRPr lang="en-US" sz="1400" dirty="0"/>
-          </a:p>
-        </p:txBody>
-      </p:sp>
-      <p:sp>
-        <p:nvSpPr>
-          <p:cNvPr id="12" name="Text 10"/>
-          <p:cNvSpPr txBox="1"/>
-          <p:nvPr/>
-        </p:nvSpPr>
-        <p:spPr>
-          <a:xfrm>
-            <a:off x="3611880" y="3931920"/>
-            <a:ext cx="2331720" cy="822960"/>
-          </a:xfrm>
-          <a:prstGeom prst="rect">
-            <a:avLst/>
-          </a:prstGeom>
-          <a:noFill/>
-          <a:ln/>
-        </p:spPr>
-        <p:txBody>
-          <a:bodyPr wrap="square" lIns="0" tIns="0" rIns="0" bIns="0" rtlCol="0" anchor="ctr"/>
-          <a:lstStyle/>
-          <a:p>
-            <a:pPr algn="ctr" indent="0" marL="0">
-              <a:buNone/>
-            </a:pPr>
-            <a:r>
-              <a:rPr lang="en-US" sz="1250" dirty="0">
-                <a:solidFill>
-                  <a:srgbClr val="5B665E"/>
-                </a:solidFill>
-                <a:latin typeface="Calibri" pitchFamily="34" charset="0"/>
-                <a:ea typeface="Calibri" pitchFamily="34" charset="-122"/>
-                <a:cs typeface="Calibri" pitchFamily="34" charset="-120"/>
-              </a:rPr>
-              <a:t>[RM]</a:t>
-            </a:r>
-            <a:endParaRPr lang="en-US" sz="1250" dirty="0"/>
-          </a:p>
-          <a:p>
-            <a:pPr algn="ctr" indent="0" marL="0">
-              <a:buNone/>
-            </a:pPr>
-            <a:r>
-              <a:rPr lang="en-US" sz="1250" dirty="0">
-                <a:solidFill>
-                  <a:srgbClr val="5B665E"/>
-                </a:solidFill>
-                <a:latin typeface="Calibri" pitchFamily="34" charset="0"/>
-                <a:ea typeface="Calibri" pitchFamily="34" charset="-122"/>
-                <a:cs typeface="Calibri" pitchFamily="34" charset="-120"/>
-              </a:rPr>
-              <a:t>[Turma]</a:t>
-            </a:r>
-            <a:endParaRPr lang="en-US" sz="1250" dirty="0"/>
-          </a:p>
-        </p:txBody>
-      </p:sp>
-      <p:sp>
-        <p:nvSpPr>
-          <p:cNvPr id="13" name="Shape 11"/>
-          <p:cNvSpPr/>
-          <p:nvPr/>
-        </p:nvSpPr>
-        <p:spPr>
-          <a:xfrm>
-            <a:off x="6309360" y="1691640"/>
-            <a:ext cx="2606040" cy="3291840"/>
-          </a:xfrm>
-          <a:prstGeom prst="roundRect">
-            <a:avLst>
-              <a:gd name="adj" fmla="val 3509"/>
-            </a:avLst>
-          </a:prstGeom>
-          <a:solidFill>
-            <a:srgbClr val="F7F7F7"/>
-          </a:solidFill>
-          <a:ln w="12700">
-            <a:solidFill>
-              <a:srgbClr val="D9D9D9"/>
-            </a:solidFill>
-            <a:prstDash val="solid"/>
-          </a:ln>
-        </p:spPr>
-      </p:sp>
-      <p:sp>
-        <p:nvSpPr>
-          <p:cNvPr id="14" name="Shape 12"/>
-          <p:cNvSpPr/>
-          <p:nvPr/>
-        </p:nvSpPr>
-        <p:spPr>
-          <a:xfrm>
-            <a:off x="7018020" y="2011680"/>
-            <a:ext cx="1188720" cy="1188720"/>
-          </a:xfrm>
-          <a:prstGeom prst="ellipse">
-            <a:avLst/>
-          </a:prstGeom>
-          <a:solidFill>
-            <a:srgbClr val="D9D9D9"/>
-          </a:solidFill>
-          <a:ln/>
-        </p:spPr>
-      </p:sp>
-      <p:sp>
-        <p:nvSpPr>
-          <p:cNvPr id="15" name="Text 13"/>
-          <p:cNvSpPr txBox="1"/>
-          <p:nvPr/>
-        </p:nvSpPr>
-        <p:spPr>
-          <a:xfrm>
-            <a:off x="7018020" y="2011680"/>
-            <a:ext cx="1188720" cy="1188720"/>
-          </a:xfrm>
-          <a:prstGeom prst="rect">
-            <a:avLst/>
-          </a:prstGeom>
-          <a:noFill/>
-          <a:ln/>
-        </p:spPr>
-        <p:txBody>
-          <a:bodyPr wrap="square" lIns="0" tIns="0" rIns="0" bIns="0" rtlCol="0" anchor="ctr"/>
-          <a:lstStyle/>
-          <a:p>
-            <a:pPr algn="ctr" indent="0" marL="0">
-              <a:buNone/>
-            </a:pPr>
-            <a:r>
-              <a:rPr lang="en-US" sz="2600" b="1" dirty="0">
-                <a:solidFill>
-                  <a:srgbClr val="FFFFFF"/>
-                </a:solidFill>
-                <a:latin typeface="Calibri" pitchFamily="34" charset="0"/>
-                <a:ea typeface="Calibri" pitchFamily="34" charset="-122"/>
-                <a:cs typeface="Calibri" pitchFamily="34" charset="-120"/>
-              </a:rPr>
-              <a:t>?</a:t>
-            </a:r>
-            <a:endParaRPr lang="en-US" sz="2600" dirty="0"/>
-          </a:p>
-        </p:txBody>
-      </p:sp>
-      <p:sp>
-        <p:nvSpPr>
-          <p:cNvPr id="16" name="Text 14"/>
-          <p:cNvSpPr txBox="1"/>
-          <p:nvPr/>
-        </p:nvSpPr>
-        <p:spPr>
-          <a:xfrm>
-            <a:off x="6446520" y="3383280"/>
-            <a:ext cx="2331720" cy="548640"/>
-          </a:xfrm>
-          <a:prstGeom prst="rect">
-            <a:avLst/>
-          </a:prstGeom>
-          <a:noFill/>
-          <a:ln/>
-        </p:spPr>
-        <p:txBody>
-          <a:bodyPr wrap="square" lIns="0" tIns="0" rIns="0" bIns="0" rtlCol="0" anchor="ctr"/>
-          <a:lstStyle/>
-          <a:p>
-            <a:pPr algn="ctr" indent="0" marL="0">
-              <a:buNone/>
-            </a:pPr>
-            <a:r>
-              <a:rPr lang="en-US" sz="1400" b="1" dirty="0">
-                <a:solidFill>
-                  <a:srgbClr val="5B665E"/>
-                </a:solidFill>
-                <a:latin typeface="Calibri" pitchFamily="34" charset="0"/>
-                <a:ea typeface="Calibri" pitchFamily="34" charset="-122"/>
-                <a:cs typeface="Calibri" pitchFamily="34" charset="-120"/>
-              </a:rPr>
-              <a:t>[Nome completo]</a:t>
-            </a:r>
-            <a:endParaRPr lang="en-US" sz="1400" dirty="0"/>
-          </a:p>
-        </p:txBody>
-      </p:sp>
-      <p:sp>
-        <p:nvSpPr>
-          <p:cNvPr id="17" name="Text 15"/>
-          <p:cNvSpPr txBox="1"/>
-          <p:nvPr/>
-        </p:nvSpPr>
-        <p:spPr>
-          <a:xfrm>
-            <a:off x="6446520" y="3931920"/>
-            <a:ext cx="2331720" cy="822960"/>
-          </a:xfrm>
-          <a:prstGeom prst="rect">
-            <a:avLst/>
-          </a:prstGeom>
-          <a:noFill/>
-          <a:ln/>
-        </p:spPr>
-        <p:txBody>
-          <a:bodyPr wrap="square" lIns="0" tIns="0" rIns="0" bIns="0" rtlCol="0" anchor="ctr"/>
-          <a:lstStyle/>
-          <a:p>
-            <a:pPr algn="ctr" indent="0" marL="0">
-              <a:buNone/>
-            </a:pPr>
-            <a:r>
-              <a:rPr lang="en-US" sz="1250" dirty="0">
-                <a:solidFill>
-                  <a:srgbClr val="5B665E"/>
-                </a:solidFill>
-                <a:latin typeface="Calibri" pitchFamily="34" charset="0"/>
-                <a:ea typeface="Calibri" pitchFamily="34" charset="-122"/>
-                <a:cs typeface="Calibri" pitchFamily="34" charset="-120"/>
-              </a:rPr>
-              <a:t>[RM]</a:t>
-            </a:r>
-            <a:endParaRPr lang="en-US" sz="1250" dirty="0"/>
-          </a:p>
-          <a:p>
-            <a:pPr algn="ctr" indent="0" marL="0">
-              <a:buNone/>
-            </a:pPr>
-            <a:r>
-              <a:rPr lang="en-US" sz="1250" dirty="0">
-                <a:solidFill>
-                  <a:srgbClr val="5B665E"/>
-                </a:solidFill>
-                <a:latin typeface="Calibri" pitchFamily="34" charset="0"/>
-                <a:ea typeface="Calibri" pitchFamily="34" charset="-122"/>
-                <a:cs typeface="Calibri" pitchFamily="34" charset="-120"/>
-              </a:rPr>
-              <a:t>[Turma]</a:t>
-            </a:r>
-            <a:endParaRPr lang="en-US" sz="1250" dirty="0"/>
-          </a:p>
-        </p:txBody>
-      </p:sp>
-      <p:sp>
-        <p:nvSpPr>
-          <p:cNvPr id="18" name="Shape 16"/>
-          <p:cNvSpPr/>
-          <p:nvPr/>
-        </p:nvSpPr>
-        <p:spPr>
-          <a:xfrm>
-            <a:off x="9144000" y="1691640"/>
-            <a:ext cx="2606040" cy="3291840"/>
-          </a:xfrm>
-          <a:prstGeom prst="roundRect">
-            <a:avLst>
-              <a:gd name="adj" fmla="val 3509"/>
-            </a:avLst>
-          </a:prstGeom>
-          <a:solidFill>
-            <a:srgbClr val="F7F7F7"/>
-          </a:solidFill>
-          <a:ln w="12700">
-            <a:solidFill>
-              <a:srgbClr val="D9D9D9"/>
-            </a:solidFill>
-            <a:prstDash val="solid"/>
-          </a:ln>
-        </p:spPr>
-      </p:sp>
-      <p:sp>
-        <p:nvSpPr>
-          <p:cNvPr id="19" name="Shape 17"/>
-          <p:cNvSpPr/>
-          <p:nvPr/>
-        </p:nvSpPr>
-        <p:spPr>
-          <a:xfrm>
-            <a:off x="9852660" y="2011680"/>
-            <a:ext cx="1188720" cy="1188720"/>
-          </a:xfrm>
-          <a:prstGeom prst="ellipse">
-            <a:avLst/>
-          </a:prstGeom>
-          <a:solidFill>
-            <a:srgbClr val="D9D9D9"/>
-          </a:solidFill>
-          <a:ln/>
-        </p:spPr>
-      </p:sp>
-      <p:sp>
-        <p:nvSpPr>
-          <p:cNvPr id="20" name="Text 18"/>
-          <p:cNvSpPr txBox="1"/>
-          <p:nvPr/>
-        </p:nvSpPr>
-        <p:spPr>
-          <a:xfrm>
-            <a:off x="9852660" y="2011680"/>
-            <a:ext cx="1188720" cy="1188720"/>
-          </a:xfrm>
-          <a:prstGeom prst="rect">
-            <a:avLst/>
-          </a:prstGeom>
-          <a:noFill/>
-          <a:ln/>
-        </p:spPr>
-        <p:txBody>
-          <a:bodyPr wrap="square" lIns="0" tIns="0" rIns="0" bIns="0" rtlCol="0" anchor="ctr"/>
-          <a:lstStyle/>
-          <a:p>
-            <a:pPr algn="ctr" indent="0" marL="0">
-              <a:buNone/>
-            </a:pPr>
-            <a:r>
-              <a:rPr lang="en-US" sz="2600" b="1" dirty="0">
-                <a:solidFill>
-                  <a:srgbClr val="FFFFFF"/>
-                </a:solidFill>
-                <a:latin typeface="Calibri" pitchFamily="34" charset="0"/>
-                <a:ea typeface="Calibri" pitchFamily="34" charset="-122"/>
-                <a:cs typeface="Calibri" pitchFamily="34" charset="-120"/>
-              </a:rPr>
-              <a:t>?</a:t>
-            </a:r>
-            <a:endParaRPr lang="en-US" sz="2600" dirty="0"/>
-          </a:p>
-        </p:txBody>
-      </p:sp>
-      <p:sp>
-        <p:nvSpPr>
-          <p:cNvPr id="21" name="Text 19"/>
-          <p:cNvSpPr txBox="1"/>
-          <p:nvPr/>
-        </p:nvSpPr>
-        <p:spPr>
-          <a:xfrm>
-            <a:off x="9281160" y="3383280"/>
-            <a:ext cx="2331720" cy="548640"/>
-          </a:xfrm>
-          <a:prstGeom prst="rect">
-            <a:avLst/>
-          </a:prstGeom>
-          <a:noFill/>
-          <a:ln/>
-        </p:spPr>
-        <p:txBody>
-          <a:bodyPr wrap="square" lIns="0" tIns="0" rIns="0" bIns="0" rtlCol="0" anchor="ctr"/>
-          <a:lstStyle/>
-          <a:p>
-            <a:pPr algn="ctr" indent="0" marL="0">
-              <a:buNone/>
-            </a:pPr>
-            <a:r>
-              <a:rPr lang="en-US" sz="1400" b="1" dirty="0">
-                <a:solidFill>
-                  <a:srgbClr val="5B665E"/>
-                </a:solidFill>
-                <a:latin typeface="Calibri" pitchFamily="34" charset="0"/>
-                <a:ea typeface="Calibri" pitchFamily="34" charset="-122"/>
-                <a:cs typeface="Calibri" pitchFamily="34" charset="-120"/>
-              </a:rPr>
-              <a:t>[Nome completo]</a:t>
-            </a:r>
-            <a:endParaRPr lang="en-US" sz="1400" dirty="0"/>
-          </a:p>
-        </p:txBody>
-      </p:sp>
-      <p:sp>
-        <p:nvSpPr>
-          <p:cNvPr id="22" name="Text 20"/>
-          <p:cNvSpPr txBox="1"/>
-          <p:nvPr/>
-        </p:nvSpPr>
-        <p:spPr>
-          <a:xfrm>
-            <a:off x="9281160" y="3931920"/>
-            <a:ext cx="2331720" cy="822960"/>
-          </a:xfrm>
-          <a:prstGeom prst="rect">
-            <a:avLst/>
-          </a:prstGeom>
-          <a:noFill/>
-          <a:ln/>
-        </p:spPr>
-        <p:txBody>
-          <a:bodyPr wrap="square" lIns="0" tIns="0" rIns="0" bIns="0" rtlCol="0" anchor="ctr"/>
-          <a:lstStyle/>
-          <a:p>
-            <a:pPr algn="ctr" indent="0" marL="0">
-              <a:buNone/>
-            </a:pPr>
-            <a:r>
-              <a:rPr lang="en-US" sz="1250" dirty="0">
-                <a:solidFill>
-                  <a:srgbClr val="5B665E"/>
-                </a:solidFill>
-                <a:latin typeface="Calibri" pitchFamily="34" charset="0"/>
-                <a:ea typeface="Calibri" pitchFamily="34" charset="-122"/>
-                <a:cs typeface="Calibri" pitchFamily="34" charset="-120"/>
-              </a:rPr>
-              <a:t>[RM]</a:t>
-            </a:r>
-            <a:endParaRPr lang="en-US" sz="1250" dirty="0"/>
-          </a:p>
-          <a:p>
-            <a:pPr algn="ctr" indent="0" marL="0">
-              <a:buNone/>
-            </a:pPr>
-            <a:r>
-              <a:rPr lang="en-US" sz="1250" dirty="0">
-                <a:solidFill>
-                  <a:srgbClr val="5B665E"/>
-                </a:solidFill>
-                <a:latin typeface="Calibri" pitchFamily="34" charset="0"/>
-                <a:ea typeface="Calibri" pitchFamily="34" charset="-122"/>
-                <a:cs typeface="Calibri" pitchFamily="34" charset="-120"/>
-              </a:rPr>
-              <a:t>[Turma]</a:t>
-            </a:r>
-            <a:endParaRPr lang="en-US" sz="1250" dirty="0"/>
-          </a:p>
-        </p:txBody>
-      </p:sp>
-      <p:sp>
-        <p:nvSpPr>
-          <p:cNvPr id="23" name="Shape 21"/>
           <p:cNvSpPr/>
           <p:nvPr/>
         </p:nvSpPr>
@@ -6358,7 +5798,7 @@
       </p:sp>
       <p:sp>
         <p:nvSpPr>
-          <p:cNvPr id="24" name="Text 22"/>
+          <p:cNvPr id="9" name="Text 7"/>
           <p:cNvSpPr txBox="1"/>
           <p:nvPr/>
         </p:nvSpPr>
@@ -6397,7 +5837,7 @@
       </p:sp>
       <p:sp>
         <p:nvSpPr>
-          <p:cNvPr id="25" name="Text 23"/>
+          <p:cNvPr id="10" name="Text 8"/>
           <p:cNvSpPr txBox="1"/>
           <p:nvPr/>
         </p:nvSpPr>
@@ -6428,7 +5868,7 @@
                 <a:ea typeface="Calibri" pitchFamily="34" charset="-122"/>
                 <a:cs typeface="Calibri" pitchFamily="34" charset="-120"/>
               </a:rPr>
-              <a:t>Quem construiu o projeto</a:t>
+              <a:t>Quem construiu este projeto</a:t>
             </a:r>
             <a:endParaRPr lang="en-US" sz="1000" dirty="0"/>
           </a:p>
@@ -6436,7 +5876,7 @@
       </p:sp>
       <p:sp>
         <p:nvSpPr>
-          <p:cNvPr id="26" name="Text 24"/>
+          <p:cNvPr id="11" name="Text 9"/>
           <p:cNvSpPr txBox="1"/>
           <p:nvPr/>
         </p:nvSpPr>

--- a/docs/slides/leroy-merlin-smart-hub.pptx
+++ b/docs/slides/leroy-merlin-smart-hub.pptx
@@ -4,6 +4,9 @@
   <p:sldMasterIdLst>
     <p:sldMasterId id="2147483648" r:id="rId1"/>
   </p:sldMasterIdLst>
+  <p:notesMasterIdLst>
+    <p:notesMasterId r:id="rId12"/>
+  </p:notesMasterIdLst>
   <p:sldIdLst>
     <p:sldId id="256" r:id="rId2"/>
     <p:sldId id="257" r:id="rId3"/>
@@ -16,9 +19,6 @@
     <p:sldId id="264" r:id="rId10"/>
     <p:sldId id="265" r:id="rId11"/>
   </p:sldIdLst>
-  <p:notesMasterIdLst>
-    <p:notesMasterId r:id="rId12"/>
-  </p:notesMasterIdLst>
   <p:sldSz cx="12192000" cy="6858000"/>
   <p:notesSz cx="6858000" cy="12192000"/>
   <p:defaultTextStyle>
@@ -113,6 +113,11 @@
       </a:defRPr>
     </a:lvl9pPr>
   </p:defaultTextStyle>
+  <p:extLst>
+    <p:ext uri="{EFAFB233-063F-42B5-8137-9DF3F51BA10A}">
+      <p15:sldGuideLst xmlns:p15="http://schemas.microsoft.com/office/powerpoint/2012/main"/>
+    </p:ext>
+  </p:extLst>
 </p:presentation>
 </file>
 
@@ -138,234 +143,10 @@
           <a:chExt cx="0" cy="0"/>
         </a:xfrm>
       </p:grpSpPr>
-      <p:sp>
-        <p:nvSpPr>
-          <p:cNvPr id="2" name="Header Placeholder 1"/>
-          <p:cNvSpPr>
-            <a:spLocks noGrp="1"/>
-          </p:cNvSpPr>
-          <p:nvPr>
-            <p:ph type="hdr" sz="quarter"/>
-          </p:nvPr>
-        </p:nvSpPr>
-        <p:spPr>
-          <a:xfrm>
-            <a:off x="0" y="0"/>
-            <a:ext cx="2971800" cy="458788"/>
-          </a:xfrm>
-          <a:prstGeom prst="rect">
-            <a:avLst/>
-          </a:prstGeom>
-        </p:spPr>
-        <p:txBody>
-          <a:bodyPr vert="horz" lIns="91440" tIns="45720" rIns="91440" bIns="45720" rtlCol="0"/>
-          <a:lstStyle>
-            <a:lvl1pPr algn="l">
-              <a:defRPr sz="1200"/>
-            </a:lvl1pPr>
-          </a:lstStyle>
-          <a:p>
-            <a:endParaRPr lang="en-US"/>
-          </a:p>
-        </p:txBody>
-      </p:sp>
-      <p:sp>
-        <p:nvSpPr>
-          <p:cNvPr id="3" name="Date Placeholder 2"/>
-          <p:cNvSpPr>
-            <a:spLocks noGrp="1"/>
-          </p:cNvSpPr>
-          <p:nvPr>
-            <p:ph type="dt" idx="1"/>
-          </p:nvPr>
-        </p:nvSpPr>
-        <p:spPr>
-          <a:xfrm>
-            <a:off x="3884613" y="0"/>
-            <a:ext cx="2971800" cy="458788"/>
-          </a:xfrm>
-          <a:prstGeom prst="rect">
-            <a:avLst/>
-          </a:prstGeom>
-        </p:spPr>
-        <p:txBody>
-          <a:bodyPr vert="horz" lIns="91440" tIns="45720" rIns="91440" bIns="45720" rtlCol="0"/>
-          <a:lstStyle>
-            <a:lvl1pPr algn="r">
-              <a:defRPr sz="1200"/>
-            </a:lvl1pPr>
-          </a:lstStyle>
-          <a:p>
-            <a:fld id="{5282F153-3F37-0F45-9E97-73ACFA13230C}" type="datetimeFigureOut">
-              <a:rPr lang="en-US"/>
-              <a:t>7/23/19</a:t>
-            </a:fld>
-            <a:endParaRPr lang="en-US"/>
-          </a:p>
-        </p:txBody>
-      </p:sp>
-      <p:sp>
-        <p:nvSpPr>
-          <p:cNvPr id="4" name="Slide Image Placeholder 3"/>
-          <p:cNvSpPr>
-            <a:spLocks noGrp="1" noRot="1" noChangeAspect="1"/>
-          </p:cNvSpPr>
-          <p:nvPr>
-            <p:ph type="sldImg" idx="2"/>
-          </p:nvPr>
-        </p:nvSpPr>
-        <p:spPr>
-          <a:xfrm>
-            <a:off x="685800" y="1143000"/>
-            <a:ext cx="5486400" cy="3086100"/>
-          </a:xfrm>
-          <a:prstGeom prst="rect">
-            <a:avLst/>
-          </a:prstGeom>
-          <a:noFill/>
-          <a:ln w="12700">
-            <a:solidFill>
-              <a:prstClr val="black"/>
-            </a:solidFill>
-          </a:ln>
-        </p:spPr>
-        <p:txBody>
-          <a:bodyPr vert="horz" lIns="91440" tIns="45720" rIns="91440" bIns="45720" rtlCol="0" anchor="ctr"/>
-          <a:lstStyle/>
-          <a:p>
-            <a:endParaRPr lang="en-US"/>
-          </a:p>
-        </p:txBody>
-      </p:sp>
-      <p:sp>
-        <p:nvSpPr>
-          <p:cNvPr id="5" name="Notes Placeholder 4"/>
-          <p:cNvSpPr>
-            <a:spLocks noGrp="1"/>
-          </p:cNvSpPr>
-          <p:nvPr>
-            <p:ph type="body" sz="quarter" idx="3"/>
-          </p:nvPr>
-        </p:nvSpPr>
-        <p:spPr>
-          <a:xfrm>
-            <a:off x="685800" y="4400550"/>
-            <a:ext cx="5486400" cy="3600450"/>
-          </a:xfrm>
-          <a:prstGeom prst="rect">
-            <a:avLst/>
-          </a:prstGeom>
-        </p:spPr>
-        <p:txBody>
-          <a:bodyPr vert="horz" lIns="91440" tIns="45720" rIns="91440" bIns="45720" rtlCol="0"/>
-          <a:lstStyle/>
-          <a:p>
-            <a:pPr lvl="0"/>
-            <a:r>
-              <a:rPr lang="en-US"/>
-              <a:t>Click to edit Master text styles</a:t>
-            </a:r>
-          </a:p>
-          <a:p>
-            <a:pPr lvl="1"/>
-            <a:r>
-              <a:rPr lang="en-US"/>
-              <a:t>Second level</a:t>
-            </a:r>
-          </a:p>
-          <a:p>
-            <a:pPr lvl="2"/>
-            <a:r>
-              <a:rPr lang="en-US"/>
-              <a:t>Third level</a:t>
-            </a:r>
-          </a:p>
-          <a:p>
-            <a:pPr lvl="3"/>
-            <a:r>
-              <a:rPr lang="en-US"/>
-              <a:t>Fourth level</a:t>
-            </a:r>
-          </a:p>
-          <a:p>
-            <a:pPr lvl="4"/>
-            <a:r>
-              <a:rPr lang="en-US"/>
-              <a:t>Fifth level</a:t>
-            </a:r>
-          </a:p>
-        </p:txBody>
-      </p:sp>
-      <p:sp>
-        <p:nvSpPr>
-          <p:cNvPr id="6" name="Footer Placeholder 5"/>
-          <p:cNvSpPr>
-            <a:spLocks noGrp="1"/>
-          </p:cNvSpPr>
-          <p:nvPr>
-            <p:ph type="ftr" sz="quarter" idx="4"/>
-          </p:nvPr>
-        </p:nvSpPr>
-        <p:spPr>
-          <a:xfrm>
-            <a:off x="0" y="8685213"/>
-            <a:ext cx="2971800" cy="458787"/>
-          </a:xfrm>
-          <a:prstGeom prst="rect">
-            <a:avLst/>
-          </a:prstGeom>
-        </p:spPr>
-        <p:txBody>
-          <a:bodyPr vert="horz" lIns="91440" tIns="45720" rIns="91440" bIns="45720" rtlCol="0" anchor="b"/>
-          <a:lstStyle>
-            <a:lvl1pPr algn="l">
-              <a:defRPr sz="1200"/>
-            </a:lvl1pPr>
-          </a:lstStyle>
-          <a:p>
-            <a:endParaRPr lang="en-US"/>
-          </a:p>
-        </p:txBody>
-      </p:sp>
-      <p:sp>
-        <p:nvSpPr>
-          <p:cNvPr id="7" name="Slide Number Placeholder 6"/>
-          <p:cNvSpPr>
-            <a:spLocks noGrp="1"/>
-          </p:cNvSpPr>
-          <p:nvPr>
-            <p:ph type="sldNum" sz="quarter" idx="5"/>
-          </p:nvPr>
-        </p:nvSpPr>
-        <p:spPr>
-          <a:xfrm>
-            <a:off x="3884613" y="8685213"/>
-            <a:ext cx="2971800" cy="458787"/>
-          </a:xfrm>
-          <a:prstGeom prst="rect">
-            <a:avLst/>
-          </a:prstGeom>
-        </p:spPr>
-        <p:txBody>
-          <a:bodyPr vert="horz" lIns="91440" tIns="45720" rIns="91440" bIns="45720" rtlCol="0" anchor="b"/>
-          <a:lstStyle>
-            <a:lvl1pPr algn="r">
-              <a:defRPr sz="1200"/>
-            </a:lvl1pPr>
-          </a:lstStyle>
-          <a:p>
-            <a:fld id="{CE5E9CC1-C706-0F49-92D6-E571CC5EEA8F}" type="slidenum">
-              <a:rPr lang="en-US"/>
-              <a:t>‹#›</a:t>
-            </a:fld>
-            <a:endParaRPr lang="en-US"/>
-          </a:p>
-        </p:txBody>
-      </p:sp>
     </p:spTree>
     <p:extLst>
       <p:ext uri="{BB962C8B-B14F-4D97-AF65-F5344CB8AC3E}">
-        <p14:creationId xmlns:p14="http://schemas.microsoft.com/office/powerpoint/2010/main" val="1024086991"/>
+        <p14:creationId xmlns:p14="http://schemas.microsoft.com/office/powerpoint/2010/main" val="3841226642"/>
       </p:ext>
     </p:extLst>
   </p:cSld>
@@ -509,10 +290,6 @@
           <a:bodyPr/>
           <a:lstStyle/>
           <a:p>
-            <a:r>
-              <a:rPr lang="en-US" dirty="0"/>
-              <a:t/>
-            </a:r>
             <a:endParaRPr lang="en-US" dirty="0"/>
           </a:p>
         </p:txBody>
@@ -597,10 +374,6 @@
           <a:bodyPr/>
           <a:lstStyle/>
           <a:p>
-            <a:r>
-              <a:rPr lang="en-US" dirty="0"/>
-              <a:t/>
-            </a:r>
             <a:endParaRPr lang="en-US" dirty="0"/>
           </a:p>
         </p:txBody>
@@ -685,10 +458,6 @@
           <a:bodyPr/>
           <a:lstStyle/>
           <a:p>
-            <a:r>
-              <a:rPr lang="en-US" dirty="0"/>
-              <a:t/>
-            </a:r>
             <a:endParaRPr lang="en-US" dirty="0"/>
           </a:p>
         </p:txBody>
@@ -773,10 +542,6 @@
           <a:bodyPr/>
           <a:lstStyle/>
           <a:p>
-            <a:r>
-              <a:rPr lang="en-US" dirty="0"/>
-              <a:t/>
-            </a:r>
             <a:endParaRPr lang="en-US" dirty="0"/>
           </a:p>
         </p:txBody>
@@ -861,10 +626,6 @@
           <a:bodyPr/>
           <a:lstStyle/>
           <a:p>
-            <a:r>
-              <a:rPr lang="en-US" dirty="0"/>
-              <a:t/>
-            </a:r>
             <a:endParaRPr lang="en-US" dirty="0"/>
           </a:p>
         </p:txBody>
@@ -949,10 +710,6 @@
           <a:bodyPr/>
           <a:lstStyle/>
           <a:p>
-            <a:r>
-              <a:rPr lang="en-US" dirty="0"/>
-              <a:t/>
-            </a:r>
             <a:endParaRPr lang="en-US" dirty="0"/>
           </a:p>
         </p:txBody>
@@ -1037,10 +794,6 @@
           <a:bodyPr/>
           <a:lstStyle/>
           <a:p>
-            <a:r>
-              <a:rPr lang="en-US" dirty="0"/>
-              <a:t/>
-            </a:r>
             <a:endParaRPr lang="en-US" dirty="0"/>
           </a:p>
         </p:txBody>
@@ -1125,10 +878,6 @@
           <a:bodyPr/>
           <a:lstStyle/>
           <a:p>
-            <a:r>
-              <a:rPr lang="en-US" dirty="0"/>
-              <a:t/>
-            </a:r>
             <a:endParaRPr lang="en-US" dirty="0"/>
           </a:p>
         </p:txBody>
@@ -1213,10 +962,6 @@
           <a:bodyPr/>
           <a:lstStyle/>
           <a:p>
-            <a:r>
-              <a:rPr lang="en-US" dirty="0"/>
-              <a:t/>
-            </a:r>
             <a:endParaRPr lang="en-US" dirty="0"/>
           </a:p>
         </p:txBody>
@@ -1301,10 +1046,6 @@
           <a:bodyPr/>
           <a:lstStyle/>
           <a:p>
-            <a:r>
-              <a:rPr lang="en-US" dirty="0"/>
-              <a:t/>
-            </a:r>
             <a:endParaRPr lang="en-US" dirty="0"/>
           </a:p>
         </p:txBody>
@@ -1378,6 +1119,11 @@
 <file path=ppt/slideMasters/slideMaster1.xml><?xml version="1.0" encoding="utf-8"?>
 <p:sldMaster xmlns:a="http://schemas.openxmlformats.org/drawingml/2006/main" xmlns:r="http://schemas.openxmlformats.org/officeDocument/2006/relationships" xmlns:p="http://schemas.openxmlformats.org/presentationml/2006/main">
   <p:cSld>
+    <p:bg>
+      <p:bgRef idx="1001">
+        <a:schemeClr val="bg1"/>
+      </p:bgRef>
+    </p:bg>
     <p:spTree>
       <p:nvGrpSpPr>
         <p:cNvPr id="1" name=""/>
@@ -1660,6 +1406,7 @@
         <a:solidFill>
           <a:srgbClr val="14532D"/>
         </a:solidFill>
+        <a:effectLst/>
       </p:bgPr>
     </p:bg>
     <p:spTree>
@@ -1695,6 +1442,13 @@
           </a:solidFill>
           <a:ln/>
         </p:spPr>
+        <p:txBody>
+          <a:bodyPr/>
+          <a:lstStyle/>
+          <a:p>
+            <a:endParaRPr lang="pt-BR"/>
+          </a:p>
+        </p:txBody>
       </p:sp>
       <p:sp>
         <p:nvSpPr>
@@ -1717,6 +1471,13 @@
           </a:solidFill>
           <a:ln/>
         </p:spPr>
+        <p:txBody>
+          <a:bodyPr/>
+          <a:lstStyle/>
+          <a:p>
+            <a:endParaRPr lang="pt-BR"/>
+          </a:p>
+        </p:txBody>
       </p:sp>
       <p:sp>
         <p:nvSpPr>
@@ -1739,6 +1500,13 @@
           </a:solidFill>
           <a:ln/>
         </p:spPr>
+        <p:txBody>
+          <a:bodyPr/>
+          <a:lstStyle/>
+          <a:p>
+            <a:endParaRPr lang="pt-BR"/>
+          </a:p>
+        </p:txBody>
       </p:sp>
       <p:sp>
         <p:nvSpPr>
@@ -1761,11 +1529,11 @@
           <a:bodyPr wrap="square" lIns="0" tIns="0" rIns="0" bIns="0" rtlCol="0" anchor="ctr"/>
           <a:lstStyle/>
           <a:p>
-            <a:pPr indent="0" marL="0">
-              <a:buNone/>
-            </a:pPr>
-            <a:r>
-              <a:rPr lang="en-US" sz="1500" b="1" spc="400" kern="0" dirty="0">
+            <a:pPr marL="0" indent="0">
+              <a:buNone/>
+            </a:pPr>
+            <a:r>
+              <a:rPr lang="en-US" sz="1500" b="1" kern="0" spc="400" dirty="0">
                 <a:solidFill>
                   <a:srgbClr val="C9A227"/>
                 </a:solidFill>
@@ -1800,7 +1568,7 @@
           <a:bodyPr wrap="square" lIns="0" tIns="0" rIns="0" bIns="0" rtlCol="0" anchor="ctr"/>
           <a:lstStyle/>
           <a:p>
-            <a:pPr indent="0" marL="0">
+            <a:pPr marL="0" indent="0">
               <a:buNone/>
             </a:pPr>
             <a:r>
@@ -1839,7 +1607,7 @@
           <a:bodyPr wrap="square" lIns="0" tIns="0" rIns="0" bIns="0" rtlCol="0" anchor="ctr"/>
           <a:lstStyle/>
           <a:p>
-            <a:pPr indent="0" marL="0">
+            <a:pPr marL="0" indent="0">
               <a:buNone/>
             </a:pPr>
             <a:r>
@@ -1880,6 +1648,13 @@
           </a:solidFill>
           <a:ln/>
         </p:spPr>
+        <p:txBody>
+          <a:bodyPr/>
+          <a:lstStyle/>
+          <a:p>
+            <a:endParaRPr lang="pt-BR"/>
+          </a:p>
+        </p:txBody>
       </p:sp>
       <p:sp>
         <p:nvSpPr>
@@ -1902,9 +1677,6 @@
           <a:bodyPr wrap="square" lIns="0" tIns="0" rIns="0" bIns="0" rtlCol="0" anchor="t"/>
           <a:lstStyle/>
           <a:p>
-            <a:pPr indent="0" marL="0">
-              <a:buNone/>
-            </a:pPr>
             <a:r>
               <a:rPr lang="en-US" sz="1400" b="1" dirty="0">
                 <a:solidFill>
@@ -1916,12 +1688,6 @@
               </a:rPr>
               <a:t>Vídeo (YouTube): </a:t>
             </a:r>
-            <a:pPr indent="0" marL="0">
-              <a:spcAft>
-                <a:spcPts val="600"/>
-              </a:spcAft>
-              <a:buNone/>
-            </a:pPr>
             <a:r>
               <a:rPr lang="en-US" sz="1400" dirty="0">
                 <a:solidFill>
@@ -1930,15 +1696,31 @@
                 <a:latin typeface="Calibri" pitchFamily="34" charset="0"/>
                 <a:ea typeface="Calibri" pitchFamily="34" charset="-122"/>
                 <a:cs typeface="Calibri" pitchFamily="34" charset="-120"/>
-              </a:rPr>
-              <a:t>[preencher após publicar]</a:t>
-            </a:r>
-            <a:endParaRPr lang="en-US" sz="1400" dirty="0"/>
-          </a:p>
-          <a:p>
-            <a:pPr indent="0" marL="0">
-              <a:buNone/>
-            </a:pPr>
+                <a:hlinkClick r:id="rId3"/>
+              </a:rPr>
+              <a:t>https://youtu.be/QsYAtsIdOeg</a:t>
+            </a:r>
+            <a:endParaRPr lang="en-US" sz="1400" dirty="0">
+              <a:solidFill>
+                <a:srgbClr val="1A1F1A"/>
+              </a:solidFill>
+              <a:latin typeface="Calibri" pitchFamily="34" charset="0"/>
+              <a:ea typeface="Calibri" pitchFamily="34" charset="-122"/>
+              <a:cs typeface="Calibri" pitchFamily="34" charset="-120"/>
+            </a:endParaRPr>
+          </a:p>
+          <a:p>
+            <a:r>
+              <a:rPr lang="en-US" sz="1400" b="1" dirty="0" err="1">
+                <a:solidFill>
+                  <a:srgbClr val="14532D"/>
+                </a:solidFill>
+                <a:latin typeface="Calibri" pitchFamily="34" charset="0"/>
+                <a:ea typeface="Calibri" pitchFamily="34" charset="-122"/>
+                <a:cs typeface="Calibri" pitchFamily="34" charset="-120"/>
+              </a:rPr>
+              <a:t>Repositório</a:t>
+            </a:r>
             <a:r>
               <a:rPr lang="en-US" sz="1400" b="1" dirty="0">
                 <a:solidFill>
@@ -1948,11 +1730,8 @@
                 <a:ea typeface="Calibri" pitchFamily="34" charset="-122"/>
                 <a:cs typeface="Calibri" pitchFamily="34" charset="-120"/>
               </a:rPr>
-              <a:t>Repositório (GitHub): </a:t>
-            </a:r>
-            <a:pPr indent="0" marL="0">
-              <a:buNone/>
-            </a:pPr>
+              <a:t> (GitHub): </a:t>
+            </a:r>
             <a:r>
               <a:rPr lang="en-US" sz="1400" dirty="0">
                 <a:solidFill>
@@ -1961,9 +1740,20 @@
                 <a:latin typeface="Calibri" pitchFamily="34" charset="0"/>
                 <a:ea typeface="Calibri" pitchFamily="34" charset="-122"/>
                 <a:cs typeface="Calibri" pitchFamily="34" charset="-120"/>
-              </a:rPr>
-              <a:t>[preencher com a URL deste repositório]</a:t>
-            </a:r>
+                <a:hlinkClick r:id="rId4"/>
+              </a:rPr>
+              <a:t>https://github.com/LeoMarsiarelli/Challenge-Leroy</a:t>
+            </a:r>
+            <a:endParaRPr lang="en-US" sz="1400" dirty="0">
+              <a:solidFill>
+                <a:srgbClr val="1A1F1A"/>
+              </a:solidFill>
+              <a:latin typeface="Calibri" pitchFamily="34" charset="0"/>
+              <a:ea typeface="Calibri" pitchFamily="34" charset="-122"/>
+              <a:cs typeface="Calibri" pitchFamily="34" charset="-120"/>
+            </a:endParaRPr>
+          </a:p>
+          <a:p>
             <a:endParaRPr lang="en-US" sz="1400" dirty="0"/>
           </a:p>
         </p:txBody>
@@ -1989,7 +1779,7 @@
           <a:bodyPr wrap="square" lIns="0" tIns="0" rIns="0" bIns="0" rtlCol="0" anchor="ctr"/>
           <a:lstStyle/>
           <a:p>
-            <a:pPr indent="0" marL="0">
+            <a:pPr marL="0" indent="0">
               <a:buNone/>
             </a:pPr>
             <a:r>
@@ -2023,6 +1813,7 @@
         <a:solidFill>
           <a:srgbClr val="14532D"/>
         </a:solidFill>
+        <a:effectLst/>
       </p:bgPr>
     </p:bg>
     <p:spTree>
@@ -2060,6 +1851,13 @@
           </a:solidFill>
           <a:ln/>
         </p:spPr>
+        <p:txBody>
+          <a:bodyPr/>
+          <a:lstStyle/>
+          <a:p>
+            <a:endParaRPr lang="pt-BR"/>
+          </a:p>
+        </p:txBody>
       </p:sp>
       <p:sp>
         <p:nvSpPr>
@@ -2082,7 +1880,7 @@
           <a:bodyPr wrap="square" lIns="0" tIns="0" rIns="0" bIns="0" rtlCol="0" anchor="ctr"/>
           <a:lstStyle/>
           <a:p>
-            <a:pPr indent="0" marL="0">
+            <a:pPr marL="0" indent="0">
               <a:buNone/>
             </a:pPr>
             <a:r>
@@ -2123,6 +1921,13 @@
           </a:solidFill>
           <a:ln/>
         </p:spPr>
+        <p:txBody>
+          <a:bodyPr/>
+          <a:lstStyle/>
+          <a:p>
+            <a:endParaRPr lang="pt-BR"/>
+          </a:p>
+        </p:txBody>
       </p:sp>
       <p:sp>
         <p:nvSpPr>
@@ -2145,7 +1950,7 @@
           <a:bodyPr wrap="square" lIns="0" tIns="0" rIns="0" bIns="0" rtlCol="0" anchor="ctr"/>
           <a:lstStyle/>
           <a:p>
-            <a:pPr algn="ctr" indent="0" marL="0">
+            <a:pPr marL="0" indent="0" algn="ctr">
               <a:buNone/>
             </a:pPr>
             <a:r>
@@ -2186,6 +1991,13 @@
           </a:solidFill>
           <a:ln/>
         </p:spPr>
+        <p:txBody>
+          <a:bodyPr/>
+          <a:lstStyle/>
+          <a:p>
+            <a:endParaRPr lang="pt-BR"/>
+          </a:p>
+        </p:txBody>
       </p:sp>
       <p:sp>
         <p:nvSpPr>
@@ -2208,7 +2020,7 @@
           <a:bodyPr wrap="square" lIns="0" tIns="0" rIns="0" bIns="0" rtlCol="0" anchor="ctr"/>
           <a:lstStyle/>
           <a:p>
-            <a:pPr algn="ctr" indent="0" marL="0">
+            <a:pPr marL="0" indent="0" algn="ctr">
               <a:buNone/>
             </a:pPr>
             <a:r>
@@ -2249,6 +2061,13 @@
           </a:solidFill>
           <a:ln/>
         </p:spPr>
+        <p:txBody>
+          <a:bodyPr/>
+          <a:lstStyle/>
+          <a:p>
+            <a:endParaRPr lang="pt-BR"/>
+          </a:p>
+        </p:txBody>
       </p:sp>
       <p:sp>
         <p:nvSpPr>
@@ -2271,7 +2090,7 @@
           <a:bodyPr wrap="square" lIns="0" tIns="0" rIns="0" bIns="0" rtlCol="0" anchor="ctr"/>
           <a:lstStyle/>
           <a:p>
-            <a:pPr algn="ctr" indent="0" marL="0">
+            <a:pPr marL="0" indent="0" algn="ctr">
               <a:buNone/>
             </a:pPr>
             <a:r>
@@ -2310,9 +2129,6 @@
           <a:bodyPr wrap="square" lIns="0" tIns="0" rIns="0" bIns="0" rtlCol="0" anchor="ctr"/>
           <a:lstStyle/>
           <a:p>
-            <a:pPr indent="0" marL="0">
-              <a:buNone/>
-            </a:pPr>
             <a:r>
               <a:rPr lang="en-US" sz="1600" dirty="0">
                 <a:solidFill>
@@ -2322,7 +2138,42 @@
                 <a:ea typeface="Calibri" pitchFamily="34" charset="-122"/>
                 <a:cs typeface="Calibri" pitchFamily="34" charset="-120"/>
               </a:rPr>
-              <a:t>Repositório: [link]   ·   Vídeo: [link]</a:t>
+              <a:t>Repositório: </a:t>
+            </a:r>
+            <a:r>
+              <a:rPr lang="en-US" sz="1600" dirty="0">
+                <a:solidFill>
+                  <a:srgbClr val="1A1F1A"/>
+                </a:solidFill>
+                <a:latin typeface="Calibri" pitchFamily="34" charset="0"/>
+                <a:ea typeface="Calibri" pitchFamily="34" charset="-122"/>
+                <a:cs typeface="Calibri" pitchFamily="34" charset="-120"/>
+                <a:hlinkClick r:id="rId3"/>
+              </a:rPr>
+              <a:t>https://github.com/LeoMarsiarelli/Challenge-Leroy</a:t>
+            </a:r>
+            <a:r>
+              <a:rPr lang="en-US" sz="1600" dirty="0">
+                <a:solidFill>
+                  <a:srgbClr val="CFE8D8"/>
+                </a:solidFill>
+                <a:latin typeface="Calibri" pitchFamily="34" charset="0"/>
+                <a:ea typeface="Calibri" pitchFamily="34" charset="-122"/>
+                <a:cs typeface="Calibri" pitchFamily="34" charset="-120"/>
+              </a:rPr>
+              <a:t>   ·   Vídeo: </a:t>
+            </a:r>
+            <a:r>
+              <a:rPr lang="en-US" sz="1600" dirty="0">
+                <a:solidFill>
+                  <a:srgbClr val="1A1F1A"/>
+                </a:solidFill>
+                <a:latin typeface="Calibri" pitchFamily="34" charset="0"/>
+                <a:ea typeface="Calibri" pitchFamily="34" charset="-122"/>
+                <a:cs typeface="Calibri" pitchFamily="34" charset="-120"/>
+                <a:hlinkClick r:id="rId4"/>
+              </a:rPr>
+              <a:t>https://youtu.be/QsYAtsIdOeg</a:t>
             </a:r>
             <a:endParaRPr lang="en-US" sz="1600" dirty="0"/>
           </a:p>
@@ -2349,7 +2200,7 @@
           <a:bodyPr wrap="square" lIns="0" tIns="0" rIns="0" bIns="0" rtlCol="0" anchor="ctr"/>
           <a:lstStyle/>
           <a:p>
-            <a:pPr indent="0" marL="0">
+            <a:pPr marL="0" indent="0">
               <a:buNone/>
             </a:pPr>
             <a:r>
@@ -2383,6 +2234,7 @@
         <a:solidFill>
           <a:srgbClr val="FFFFFF"/>
         </a:solidFill>
+        <a:effectLst/>
       </p:bgPr>
     </p:bg>
     <p:spTree>
@@ -2420,7 +2272,7 @@
           <a:bodyPr wrap="square" lIns="0" tIns="0" rIns="0" bIns="0" rtlCol="0" anchor="ctr"/>
           <a:lstStyle/>
           <a:p>
-            <a:pPr indent="0" marL="0">
+            <a:pPr marL="0" indent="0">
               <a:buNone/>
             </a:pPr>
             <a:r>
@@ -2459,13 +2311,20 @@
           </a:solidFill>
           <a:ln/>
           <a:effectLst>
-            <a:outerShdw sx="100000" sy="100000" kx="0" ky="0" algn="bl" rotWithShape="0" blurRad="76200" dist="25400" dir="5400000">
+            <a:outerShdw blurRad="76200" dist="25400" dir="5400000" algn="bl" rotWithShape="0">
               <a:srgbClr val="000000">
                 <a:alpha val="12000"/>
               </a:srgbClr>
             </a:outerShdw>
           </a:effectLst>
         </p:spPr>
+        <p:txBody>
+          <a:bodyPr/>
+          <a:lstStyle/>
+          <a:p>
+            <a:endParaRPr lang="pt-BR"/>
+          </a:p>
+        </p:txBody>
       </p:sp>
       <p:sp>
         <p:nvSpPr>
@@ -2486,6 +2345,13 @@
           </a:solidFill>
           <a:ln/>
         </p:spPr>
+        <p:txBody>
+          <a:bodyPr/>
+          <a:lstStyle/>
+          <a:p>
+            <a:endParaRPr lang="pt-BR"/>
+          </a:p>
+        </p:txBody>
       </p:sp>
       <p:sp>
         <p:nvSpPr>
@@ -2508,7 +2374,7 @@
           <a:bodyPr wrap="square" lIns="0" tIns="0" rIns="0" bIns="0" rtlCol="0" anchor="ctr"/>
           <a:lstStyle/>
           <a:p>
-            <a:pPr algn="ctr" indent="0" marL="0">
+            <a:pPr marL="0" indent="0" algn="ctr">
               <a:buNone/>
             </a:pPr>
             <a:r>
@@ -2547,7 +2413,7 @@
           <a:bodyPr wrap="square" lIns="0" tIns="0" rIns="0" bIns="0" rtlCol="0" anchor="ctr"/>
           <a:lstStyle/>
           <a:p>
-            <a:pPr indent="0" marL="0">
+            <a:pPr marL="0" indent="0">
               <a:buNone/>
             </a:pPr>
             <a:r>
@@ -2586,13 +2452,20 @@
           </a:solidFill>
           <a:ln/>
           <a:effectLst>
-            <a:outerShdw sx="100000" sy="100000" kx="0" ky="0" algn="bl" rotWithShape="0" blurRad="76200" dist="25400" dir="5400000">
+            <a:outerShdw blurRad="76200" dist="25400" dir="5400000" algn="bl" rotWithShape="0">
               <a:srgbClr val="000000">
                 <a:alpha val="12000"/>
               </a:srgbClr>
             </a:outerShdw>
           </a:effectLst>
         </p:spPr>
+        <p:txBody>
+          <a:bodyPr/>
+          <a:lstStyle/>
+          <a:p>
+            <a:endParaRPr lang="pt-BR"/>
+          </a:p>
+        </p:txBody>
       </p:sp>
       <p:sp>
         <p:nvSpPr>
@@ -2613,6 +2486,13 @@
           </a:solidFill>
           <a:ln/>
         </p:spPr>
+        <p:txBody>
+          <a:bodyPr/>
+          <a:lstStyle/>
+          <a:p>
+            <a:endParaRPr lang="pt-BR"/>
+          </a:p>
+        </p:txBody>
       </p:sp>
       <p:sp>
         <p:nvSpPr>
@@ -2635,7 +2515,7 @@
           <a:bodyPr wrap="square" lIns="0" tIns="0" rIns="0" bIns="0" rtlCol="0" anchor="ctr"/>
           <a:lstStyle/>
           <a:p>
-            <a:pPr algn="ctr" indent="0" marL="0">
+            <a:pPr marL="0" indent="0" algn="ctr">
               <a:buNone/>
             </a:pPr>
             <a:r>
@@ -2674,7 +2554,7 @@
           <a:bodyPr wrap="square" lIns="0" tIns="0" rIns="0" bIns="0" rtlCol="0" anchor="ctr"/>
           <a:lstStyle/>
           <a:p>
-            <a:pPr indent="0" marL="0">
+            <a:pPr marL="0" indent="0">
               <a:buNone/>
             </a:pPr>
             <a:r>
@@ -2713,13 +2593,20 @@
           </a:solidFill>
           <a:ln/>
           <a:effectLst>
-            <a:outerShdw sx="100000" sy="100000" kx="0" ky="0" algn="bl" rotWithShape="0" blurRad="76200" dist="25400" dir="5400000">
+            <a:outerShdw blurRad="76200" dist="25400" dir="5400000" algn="bl" rotWithShape="0">
               <a:srgbClr val="000000">
                 <a:alpha val="12000"/>
               </a:srgbClr>
             </a:outerShdw>
           </a:effectLst>
         </p:spPr>
+        <p:txBody>
+          <a:bodyPr/>
+          <a:lstStyle/>
+          <a:p>
+            <a:endParaRPr lang="pt-BR"/>
+          </a:p>
+        </p:txBody>
       </p:sp>
       <p:sp>
         <p:nvSpPr>
@@ -2740,6 +2627,13 @@
           </a:solidFill>
           <a:ln/>
         </p:spPr>
+        <p:txBody>
+          <a:bodyPr/>
+          <a:lstStyle/>
+          <a:p>
+            <a:endParaRPr lang="pt-BR"/>
+          </a:p>
+        </p:txBody>
       </p:sp>
       <p:sp>
         <p:nvSpPr>
@@ -2762,7 +2656,7 @@
           <a:bodyPr wrap="square" lIns="0" tIns="0" rIns="0" bIns="0" rtlCol="0" anchor="ctr"/>
           <a:lstStyle/>
           <a:p>
-            <a:pPr algn="ctr" indent="0" marL="0">
+            <a:pPr marL="0" indent="0" algn="ctr">
               <a:buNone/>
             </a:pPr>
             <a:r>
@@ -2801,7 +2695,7 @@
           <a:bodyPr wrap="square" lIns="0" tIns="0" rIns="0" bIns="0" rtlCol="0" anchor="ctr"/>
           <a:lstStyle/>
           <a:p>
-            <a:pPr indent="0" marL="0">
+            <a:pPr marL="0" indent="0">
               <a:buNone/>
             </a:pPr>
             <a:r>
@@ -2840,7 +2734,7 @@
           <a:bodyPr wrap="square" lIns="0" tIns="0" rIns="0" bIns="0" rtlCol="0" anchor="ctr"/>
           <a:lstStyle/>
           <a:p>
-            <a:pPr indent="0" marL="0">
+            <a:pPr marL="0" indent="0">
               <a:buNone/>
             </a:pPr>
             <a:r>
@@ -2879,7 +2773,7 @@
           <a:bodyPr wrap="square" lIns="0" tIns="0" rIns="0" bIns="0" rtlCol="0" anchor="ctr"/>
           <a:lstStyle/>
           <a:p>
-            <a:pPr algn="r" indent="0" marL="0">
+            <a:pPr marL="0" indent="0" algn="r">
               <a:buNone/>
             </a:pPr>
             <a:r>
@@ -2913,6 +2807,7 @@
         <a:solidFill>
           <a:srgbClr val="FFFFFF"/>
         </a:solidFill>
+        <a:effectLst/>
       </p:bgPr>
     </p:bg>
     <p:spTree>
@@ -2950,7 +2845,7 @@
           <a:bodyPr wrap="square" lIns="0" tIns="0" rIns="0" bIns="0" rtlCol="0" anchor="ctr"/>
           <a:lstStyle/>
           <a:p>
-            <a:pPr indent="0" marL="0">
+            <a:pPr marL="0" indent="0">
               <a:buNone/>
             </a:pPr>
             <a:r>
@@ -2989,6 +2884,13 @@
           </a:solidFill>
           <a:ln/>
         </p:spPr>
+        <p:txBody>
+          <a:bodyPr/>
+          <a:lstStyle/>
+          <a:p>
+            <a:endParaRPr lang="pt-BR"/>
+          </a:p>
+        </p:txBody>
       </p:sp>
       <p:sp>
         <p:nvSpPr>
@@ -3011,7 +2913,7 @@
           <a:bodyPr wrap="square" lIns="0" tIns="0" rIns="0" bIns="0" rtlCol="0" anchor="ctr"/>
           <a:lstStyle/>
           <a:p>
-            <a:pPr indent="0" marL="0">
+            <a:pPr marL="0" indent="0">
               <a:buNone/>
             </a:pPr>
             <a:r>
@@ -3093,6 +2995,13 @@
           </a:solidFill>
           <a:ln/>
         </p:spPr>
+        <p:txBody>
+          <a:bodyPr/>
+          <a:lstStyle/>
+          <a:p>
+            <a:endParaRPr lang="pt-BR"/>
+          </a:p>
+        </p:txBody>
       </p:sp>
       <p:sp>
         <p:nvSpPr>
@@ -3115,7 +3024,7 @@
           <a:bodyPr wrap="square" lIns="0" tIns="0" rIns="0" bIns="0" rtlCol="0" anchor="ctr"/>
           <a:lstStyle/>
           <a:p>
-            <a:pPr indent="0" marL="0">
+            <a:pPr marL="0" indent="0">
               <a:buNone/>
             </a:pPr>
             <a:r>
@@ -3154,7 +3063,7 @@
           <a:bodyPr wrap="square" lIns="0" tIns="0" rIns="0" bIns="0" rtlCol="0" anchor="t"/>
           <a:lstStyle/>
           <a:p>
-            <a:pPr indent="0" marL="0">
+            <a:pPr marL="0" indent="0">
               <a:buNone/>
             </a:pPr>
             <a:r>
@@ -3195,6 +3104,13 @@
           </a:solidFill>
           <a:ln/>
         </p:spPr>
+        <p:txBody>
+          <a:bodyPr/>
+          <a:lstStyle/>
+          <a:p>
+            <a:endParaRPr lang="pt-BR"/>
+          </a:p>
+        </p:txBody>
       </p:sp>
       <p:sp>
         <p:nvSpPr>
@@ -3217,7 +3133,7 @@
           <a:bodyPr wrap="square" lIns="0" tIns="0" rIns="0" bIns="0" rtlCol="0" anchor="ctr"/>
           <a:lstStyle/>
           <a:p>
-            <a:pPr indent="0" marL="0">
+            <a:pPr marL="0" indent="0">
               <a:buNone/>
             </a:pPr>
             <a:r>
@@ -3256,7 +3172,7 @@
           <a:bodyPr wrap="square" lIns="0" tIns="0" rIns="0" bIns="0" rtlCol="0" anchor="ctr"/>
           <a:lstStyle/>
           <a:p>
-            <a:pPr indent="0" marL="0">
+            <a:pPr marL="0" indent="0">
               <a:buNone/>
             </a:pPr>
             <a:r>
@@ -3295,7 +3211,7 @@
           <a:bodyPr wrap="square" lIns="0" tIns="0" rIns="0" bIns="0" rtlCol="0" anchor="ctr"/>
           <a:lstStyle/>
           <a:p>
-            <a:pPr indent="0" marL="0">
+            <a:pPr marL="0" indent="0">
               <a:buNone/>
             </a:pPr>
             <a:r>
@@ -3334,7 +3250,7 @@
           <a:bodyPr wrap="square" lIns="0" tIns="0" rIns="0" bIns="0" rtlCol="0" anchor="ctr"/>
           <a:lstStyle/>
           <a:p>
-            <a:pPr algn="r" indent="0" marL="0">
+            <a:pPr marL="0" indent="0" algn="r">
               <a:buNone/>
             </a:pPr>
             <a:r>
@@ -3368,6 +3284,7 @@
         <a:solidFill>
           <a:srgbClr val="FFFFFF"/>
         </a:solidFill>
+        <a:effectLst/>
       </p:bgPr>
     </p:bg>
     <p:spTree>
@@ -3405,7 +3322,7 @@
           <a:bodyPr wrap="square" lIns="0" tIns="0" rIns="0" bIns="0" rtlCol="0" anchor="ctr"/>
           <a:lstStyle/>
           <a:p>
-            <a:pPr indent="0" marL="0">
+            <a:pPr marL="0" indent="0">
               <a:buNone/>
             </a:pPr>
             <a:r>
@@ -3529,6 +3446,13 @@
           </a:solidFill>
           <a:ln/>
         </p:spPr>
+        <p:txBody>
+          <a:bodyPr/>
+          <a:lstStyle/>
+          <a:p>
+            <a:endParaRPr lang="pt-BR"/>
+          </a:p>
+        </p:txBody>
       </p:sp>
       <p:sp>
         <p:nvSpPr>
@@ -3551,7 +3475,7 @@
           <a:bodyPr wrap="square" lIns="0" tIns="0" rIns="0" bIns="0" rtlCol="0" anchor="ctr"/>
           <a:lstStyle/>
           <a:p>
-            <a:pPr algn="ctr" indent="0" marL="0">
+            <a:pPr marL="0" indent="0" algn="ctr">
               <a:buNone/>
             </a:pPr>
             <a:r>
@@ -3590,7 +3514,7 @@
           <a:bodyPr wrap="square" lIns="0" tIns="0" rIns="0" bIns="0" rtlCol="0" anchor="ctr"/>
           <a:lstStyle/>
           <a:p>
-            <a:pPr algn="ctr" indent="0" marL="0">
+            <a:pPr marL="0" indent="0" algn="ctr">
               <a:buNone/>
             </a:pPr>
             <a:r>
@@ -3629,6 +3553,13 @@
           </a:solidFill>
           <a:ln/>
         </p:spPr>
+        <p:txBody>
+          <a:bodyPr/>
+          <a:lstStyle/>
+          <a:p>
+            <a:endParaRPr lang="pt-BR"/>
+          </a:p>
+        </p:txBody>
       </p:sp>
       <p:sp>
         <p:nvSpPr>
@@ -3651,7 +3582,7 @@
           <a:bodyPr wrap="square" lIns="0" tIns="0" rIns="0" bIns="0" rtlCol="0" anchor="ctr"/>
           <a:lstStyle/>
           <a:p>
-            <a:pPr algn="ctr" indent="0" marL="0">
+            <a:pPr marL="0" indent="0" algn="ctr">
               <a:buNone/>
             </a:pPr>
             <a:r>
@@ -3668,7 +3599,7 @@
             <a:endParaRPr lang="en-US" sz="1200" dirty="0"/>
           </a:p>
           <a:p>
-            <a:pPr algn="ctr" indent="0" marL="0">
+            <a:pPr marL="0" indent="0" algn="ctr">
               <a:buNone/>
             </a:pPr>
             <a:r>
@@ -3707,7 +3638,7 @@
           <a:bodyPr wrap="square" lIns="0" tIns="0" rIns="0" bIns="0" rtlCol="0" anchor="ctr"/>
           <a:lstStyle/>
           <a:p>
-            <a:pPr algn="ctr" indent="0" marL="0">
+            <a:pPr marL="0" indent="0" algn="ctr">
               <a:buNone/>
             </a:pPr>
             <a:r>
@@ -3746,6 +3677,13 @@
           </a:solidFill>
           <a:ln/>
         </p:spPr>
+        <p:txBody>
+          <a:bodyPr/>
+          <a:lstStyle/>
+          <a:p>
+            <a:endParaRPr lang="pt-BR"/>
+          </a:p>
+        </p:txBody>
       </p:sp>
       <p:sp>
         <p:nvSpPr>
@@ -3768,7 +3706,7 @@
           <a:bodyPr wrap="square" lIns="0" tIns="0" rIns="0" bIns="0" rtlCol="0" anchor="ctr"/>
           <a:lstStyle/>
           <a:p>
-            <a:pPr algn="ctr" indent="0" marL="0">
+            <a:pPr marL="0" indent="0" algn="ctr">
               <a:buNone/>
             </a:pPr>
             <a:r>
@@ -3785,7 +3723,7 @@
             <a:endParaRPr lang="en-US" sz="1200" dirty="0"/>
           </a:p>
           <a:p>
-            <a:pPr algn="ctr" indent="0" marL="0">
+            <a:pPr marL="0" indent="0" algn="ctr">
               <a:buNone/>
             </a:pPr>
             <a:r>
@@ -3824,7 +3762,7 @@
           <a:bodyPr wrap="square" lIns="0" tIns="0" rIns="0" bIns="0" rtlCol="0" anchor="ctr"/>
           <a:lstStyle/>
           <a:p>
-            <a:pPr algn="ctr" indent="0" marL="0">
+            <a:pPr marL="0" indent="0" algn="ctr">
               <a:buNone/>
             </a:pPr>
             <a:r>
@@ -3863,6 +3801,13 @@
           </a:solidFill>
           <a:ln/>
         </p:spPr>
+        <p:txBody>
+          <a:bodyPr/>
+          <a:lstStyle/>
+          <a:p>
+            <a:endParaRPr lang="pt-BR"/>
+          </a:p>
+        </p:txBody>
       </p:sp>
       <p:sp>
         <p:nvSpPr>
@@ -3885,7 +3830,7 @@
           <a:bodyPr wrap="square" lIns="0" tIns="0" rIns="0" bIns="0" rtlCol="0" anchor="ctr"/>
           <a:lstStyle/>
           <a:p>
-            <a:pPr algn="ctr" indent="0" marL="0">
+            <a:pPr marL="0" indent="0" algn="ctr">
               <a:buNone/>
             </a:pPr>
             <a:r>
@@ -3902,7 +3847,7 @@
             <a:endParaRPr lang="en-US" sz="1200" dirty="0"/>
           </a:p>
           <a:p>
-            <a:pPr algn="ctr" indent="0" marL="0">
+            <a:pPr marL="0" indent="0" algn="ctr">
               <a:buNone/>
             </a:pPr>
             <a:r>
@@ -3941,7 +3886,7 @@
           <a:bodyPr wrap="square" lIns="0" tIns="0" rIns="0" bIns="0" rtlCol="0" anchor="ctr"/>
           <a:lstStyle/>
           <a:p>
-            <a:pPr algn="ctr" indent="0" marL="0">
+            <a:pPr marL="0" indent="0" algn="ctr">
               <a:buNone/>
             </a:pPr>
             <a:r>
@@ -3980,6 +3925,13 @@
           </a:solidFill>
           <a:ln/>
         </p:spPr>
+        <p:txBody>
+          <a:bodyPr/>
+          <a:lstStyle/>
+          <a:p>
+            <a:endParaRPr lang="pt-BR"/>
+          </a:p>
+        </p:txBody>
       </p:sp>
       <p:sp>
         <p:nvSpPr>
@@ -4002,7 +3954,7 @@
           <a:bodyPr wrap="square" lIns="0" tIns="0" rIns="0" bIns="0" rtlCol="0" anchor="ctr"/>
           <a:lstStyle/>
           <a:p>
-            <a:pPr algn="ctr" indent="0" marL="0">
+            <a:pPr marL="0" indent="0" algn="ctr">
               <a:buNone/>
             </a:pPr>
             <a:r>
@@ -4019,7 +3971,7 @@
             <a:endParaRPr lang="en-US" sz="1200" dirty="0"/>
           </a:p>
           <a:p>
-            <a:pPr algn="ctr" indent="0" marL="0">
+            <a:pPr marL="0" indent="0" algn="ctr">
               <a:buNone/>
             </a:pPr>
             <a:r>
@@ -4058,7 +4010,7 @@
           <a:bodyPr wrap="square" lIns="0" tIns="0" rIns="0" bIns="0" rtlCol="0" anchor="ctr"/>
           <a:lstStyle/>
           <a:p>
-            <a:pPr algn="ctr" indent="0" marL="0">
+            <a:pPr marL="0" indent="0" algn="ctr">
               <a:buNone/>
             </a:pPr>
             <a:r>
@@ -4097,6 +4049,13 @@
           </a:solidFill>
           <a:ln/>
         </p:spPr>
+        <p:txBody>
+          <a:bodyPr/>
+          <a:lstStyle/>
+          <a:p>
+            <a:endParaRPr lang="pt-BR"/>
+          </a:p>
+        </p:txBody>
       </p:sp>
       <p:sp>
         <p:nvSpPr>
@@ -4119,7 +4078,7 @@
           <a:bodyPr wrap="square" lIns="0" tIns="0" rIns="0" bIns="0" rtlCol="0" anchor="ctr"/>
           <a:lstStyle/>
           <a:p>
-            <a:pPr algn="ctr" indent="0" marL="0">
+            <a:pPr marL="0" indent="0" algn="ctr">
               <a:buNone/>
             </a:pPr>
             <a:r>
@@ -4136,7 +4095,7 @@
             <a:endParaRPr lang="en-US" sz="1200" dirty="0"/>
           </a:p>
           <a:p>
-            <a:pPr algn="ctr" indent="0" marL="0">
+            <a:pPr marL="0" indent="0" algn="ctr">
               <a:buNone/>
             </a:pPr>
             <a:r>
@@ -4175,7 +4134,7 @@
           <a:bodyPr wrap="square" lIns="0" tIns="0" rIns="0" bIns="0" rtlCol="0" anchor="ctr"/>
           <a:lstStyle/>
           <a:p>
-            <a:pPr indent="0" marL="0">
+            <a:pPr marL="0" indent="0">
               <a:buNone/>
             </a:pPr>
             <a:r>
@@ -4214,7 +4173,7 @@
           <a:bodyPr wrap="square" lIns="0" tIns="0" rIns="0" bIns="0" rtlCol="0" anchor="ctr"/>
           <a:lstStyle/>
           <a:p>
-            <a:pPr algn="r" indent="0" marL="0">
+            <a:pPr marL="0" indent="0" algn="r">
               <a:buNone/>
             </a:pPr>
             <a:r>
@@ -4248,6 +4207,7 @@
         <a:solidFill>
           <a:srgbClr val="FFFFFF"/>
         </a:solidFill>
+        <a:effectLst/>
       </p:bgPr>
     </p:bg>
     <p:spTree>
@@ -4285,7 +4245,7 @@
           <a:bodyPr wrap="square" lIns="0" tIns="0" rIns="0" bIns="0" rtlCol="0" anchor="ctr"/>
           <a:lstStyle/>
           <a:p>
-            <a:pPr indent="0" marL="0">
+            <a:pPr marL="0" indent="0">
               <a:buNone/>
             </a:pPr>
             <a:r>
@@ -4393,6 +4353,13 @@
             <a:prstDash val="solid"/>
           </a:ln>
         </p:spPr>
+        <p:txBody>
+          <a:bodyPr/>
+          <a:lstStyle/>
+          <a:p>
+            <a:endParaRPr lang="pt-BR"/>
+          </a:p>
+        </p:txBody>
       </p:sp>
       <p:sp>
         <p:nvSpPr>
@@ -4415,7 +4382,7 @@
           <a:bodyPr wrap="square" lIns="0" tIns="0" rIns="0" bIns="0" rtlCol="0" anchor="ctr"/>
           <a:lstStyle/>
           <a:p>
-            <a:pPr algn="ctr" indent="0" marL="0">
+            <a:pPr marL="0" indent="0" algn="ctr">
               <a:buNone/>
             </a:pPr>
             <a:r>
@@ -4454,7 +4421,7 @@
           <a:bodyPr wrap="square" lIns="0" tIns="0" rIns="0" bIns="0" rtlCol="0" anchor="t"/>
           <a:lstStyle/>
           <a:p>
-            <a:pPr algn="ctr" indent="0" marL="0">
+            <a:pPr marL="0" indent="0" algn="ctr">
               <a:buNone/>
             </a:pPr>
             <a:r>
@@ -4493,7 +4460,7 @@
           <a:bodyPr wrap="square" lIns="0" tIns="0" rIns="0" bIns="0" rtlCol="0" anchor="ctr"/>
           <a:lstStyle/>
           <a:p>
-            <a:pPr indent="0" marL="0">
+            <a:pPr marL="0" indent="0">
               <a:buNone/>
             </a:pPr>
             <a:r>
@@ -4532,7 +4499,7 @@
           <a:bodyPr wrap="square" lIns="0" tIns="0" rIns="0" bIns="0" rtlCol="0" anchor="ctr"/>
           <a:lstStyle/>
           <a:p>
-            <a:pPr algn="r" indent="0" marL="0">
+            <a:pPr marL="0" indent="0" algn="r">
               <a:buNone/>
             </a:pPr>
             <a:r>
@@ -4550,6 +4517,36 @@
           </a:p>
         </p:txBody>
       </p:sp>
+      <p:pic>
+        <p:nvPicPr>
+          <p:cNvPr id="10" name="Imagem 9">
+            <a:extLst>
+              <a:ext uri="{FF2B5EF4-FFF2-40B4-BE49-F238E27FC236}">
+                <a16:creationId xmlns:a16="http://schemas.microsoft.com/office/drawing/2014/main" id="{D50AA617-91DC-D6D2-6EBE-7EF5798CAE8D}"/>
+              </a:ext>
+            </a:extLst>
+          </p:cNvPr>
+          <p:cNvPicPr>
+            <a:picLocks noChangeAspect="1"/>
+          </p:cNvPicPr>
+          <p:nvPr/>
+        </p:nvPicPr>
+        <p:blipFill>
+          <a:blip r:embed="rId3"/>
+          <a:stretch>
+            <a:fillRect/>
+          </a:stretch>
+        </p:blipFill>
+        <p:spPr>
+          <a:xfrm>
+            <a:off x="6031029" y="2375517"/>
+            <a:ext cx="5357261" cy="2792765"/>
+          </a:xfrm>
+          <a:prstGeom prst="rect">
+            <a:avLst/>
+          </a:prstGeom>
+        </p:spPr>
+      </p:pic>
     </p:spTree>
   </p:cSld>
   <p:clrMapOvr>
@@ -4566,6 +4563,7 @@
         <a:solidFill>
           <a:srgbClr val="FFFFFF"/>
         </a:solidFill>
+        <a:effectLst/>
       </p:bgPr>
     </p:bg>
     <p:spTree>
@@ -4603,7 +4601,7 @@
           <a:bodyPr wrap="square" lIns="0" tIns="0" rIns="0" bIns="0" rtlCol="0" anchor="ctr"/>
           <a:lstStyle/>
           <a:p>
-            <a:pPr indent="0" marL="0">
+            <a:pPr marL="0" indent="0">
               <a:buNone/>
             </a:pPr>
             <a:r>
@@ -4732,6 +4730,13 @@
             <a:prstDash val="solid"/>
           </a:ln>
         </p:spPr>
+        <p:txBody>
+          <a:bodyPr/>
+          <a:lstStyle/>
+          <a:p>
+            <a:endParaRPr lang="pt-BR"/>
+          </a:p>
+        </p:txBody>
       </p:sp>
       <p:sp>
         <p:nvSpPr>
@@ -4754,7 +4759,7 @@
           <a:bodyPr wrap="square" lIns="0" tIns="0" rIns="0" bIns="0" rtlCol="0" anchor="ctr"/>
           <a:lstStyle/>
           <a:p>
-            <a:pPr algn="ctr" indent="0" marL="0">
+            <a:pPr marL="0" indent="0" algn="ctr">
               <a:buNone/>
             </a:pPr>
             <a:r>
@@ -4793,7 +4798,7 @@
           <a:bodyPr wrap="square" lIns="0" tIns="0" rIns="0" bIns="0" rtlCol="0" anchor="t"/>
           <a:lstStyle/>
           <a:p>
-            <a:pPr algn="ctr" indent="0" marL="0">
+            <a:pPr marL="0" indent="0" algn="ctr">
               <a:buNone/>
             </a:pPr>
             <a:r>
@@ -4832,7 +4837,7 @@
           <a:bodyPr wrap="square" lIns="0" tIns="0" rIns="0" bIns="0" rtlCol="0" anchor="ctr"/>
           <a:lstStyle/>
           <a:p>
-            <a:pPr indent="0" marL="0">
+            <a:pPr marL="0" indent="0">
               <a:buNone/>
             </a:pPr>
             <a:r>
@@ -4871,7 +4876,7 @@
           <a:bodyPr wrap="square" lIns="0" tIns="0" rIns="0" bIns="0" rtlCol="0" anchor="ctr"/>
           <a:lstStyle/>
           <a:p>
-            <a:pPr algn="r" indent="0" marL="0">
+            <a:pPr marL="0" indent="0" algn="r">
               <a:buNone/>
             </a:pPr>
             <a:r>
@@ -4889,6 +4894,36 @@
           </a:p>
         </p:txBody>
       </p:sp>
+      <p:pic>
+        <p:nvPicPr>
+          <p:cNvPr id="10" name="Imagem 9">
+            <a:extLst>
+              <a:ext uri="{FF2B5EF4-FFF2-40B4-BE49-F238E27FC236}">
+                <a16:creationId xmlns:a16="http://schemas.microsoft.com/office/drawing/2014/main" id="{B463B871-2D09-C0EE-976C-CCD15E223724}"/>
+              </a:ext>
+            </a:extLst>
+          </p:cNvPr>
+          <p:cNvPicPr>
+            <a:picLocks noChangeAspect="1"/>
+          </p:cNvPicPr>
+          <p:nvPr/>
+        </p:nvPicPr>
+        <p:blipFill>
+          <a:blip r:embed="rId3"/>
+          <a:stretch>
+            <a:fillRect/>
+          </a:stretch>
+        </p:blipFill>
+        <p:spPr>
+          <a:xfrm>
+            <a:off x="6065521" y="2430276"/>
+            <a:ext cx="5404832" cy="2820407"/>
+          </a:xfrm>
+          <a:prstGeom prst="rect">
+            <a:avLst/>
+          </a:prstGeom>
+        </p:spPr>
+      </p:pic>
     </p:spTree>
   </p:cSld>
   <p:clrMapOvr>
@@ -4905,6 +4940,7 @@
         <a:solidFill>
           <a:srgbClr val="14532D"/>
         </a:solidFill>
+        <a:effectLst/>
       </p:bgPr>
     </p:bg>
     <p:spTree>
@@ -4942,6 +4978,13 @@
           </a:solidFill>
           <a:ln/>
         </p:spPr>
+        <p:txBody>
+          <a:bodyPr/>
+          <a:lstStyle/>
+          <a:p>
+            <a:endParaRPr lang="pt-BR"/>
+          </a:p>
+        </p:txBody>
       </p:sp>
       <p:sp>
         <p:nvSpPr>
@@ -4964,11 +5007,11 @@
           <a:bodyPr wrap="square" lIns="0" tIns="0" rIns="0" bIns="0" rtlCol="0" anchor="ctr"/>
           <a:lstStyle/>
           <a:p>
-            <a:pPr indent="0" marL="0">
-              <a:buNone/>
-            </a:pPr>
-            <a:r>
-              <a:rPr lang="en-US" sz="2200" b="1" spc="300" kern="0" dirty="0">
+            <a:pPr marL="0" indent="0">
+              <a:buNone/>
+            </a:pPr>
+            <a:r>
+              <a:rPr lang="en-US" sz="2200" b="1" kern="0" spc="300" dirty="0">
                 <a:solidFill>
                   <a:srgbClr val="C9A227"/>
                 </a:solidFill>
@@ -5003,7 +5046,7 @@
           <a:bodyPr wrap="square" lIns="0" tIns="0" rIns="0" bIns="0" rtlCol="0" anchor="ctr"/>
           <a:lstStyle/>
           <a:p>
-            <a:pPr algn="l" indent="0" marL="0">
+            <a:pPr marL="0" indent="0" algn="l">
               <a:buNone/>
             </a:pPr>
             <a:r>
@@ -5020,7 +5063,7 @@
             <a:endParaRPr lang="en-US" sz="3800" dirty="0"/>
           </a:p>
           <a:p>
-            <a:pPr algn="l" indent="0" marL="0">
+            <a:pPr marL="0" indent="0" algn="l">
               <a:buNone/>
             </a:pPr>
             <a:r>
@@ -5059,7 +5102,7 @@
           <a:bodyPr wrap="square" lIns="0" tIns="0" rIns="0" bIns="0" rtlCol="0" anchor="ctr"/>
           <a:lstStyle/>
           <a:p>
-            <a:pPr indent="0" marL="0">
+            <a:pPr marL="0" indent="0">
               <a:buNone/>
             </a:pPr>
             <a:r>
@@ -5093,6 +5136,7 @@
         <a:solidFill>
           <a:srgbClr val="FFFFFF"/>
         </a:solidFill>
+        <a:effectLst/>
       </p:bgPr>
     </p:bg>
     <p:spTree>
@@ -5130,7 +5174,7 @@
           <a:bodyPr wrap="square" lIns="0" tIns="0" rIns="0" bIns="0" rtlCol="0" anchor="ctr"/>
           <a:lstStyle/>
           <a:p>
-            <a:pPr indent="0" marL="0">
+            <a:pPr marL="0" indent="0">
               <a:buNone/>
             </a:pPr>
             <a:r>
@@ -5169,6 +5213,13 @@
           </a:solidFill>
           <a:ln/>
         </p:spPr>
+        <p:txBody>
+          <a:bodyPr/>
+          <a:lstStyle/>
+          <a:p>
+            <a:endParaRPr lang="pt-BR"/>
+          </a:p>
+        </p:txBody>
       </p:sp>
       <p:sp>
         <p:nvSpPr>
@@ -5191,7 +5242,7 @@
           <a:bodyPr wrap="square" lIns="0" tIns="0" rIns="0" bIns="0" rtlCol="0" anchor="ctr"/>
           <a:lstStyle/>
           <a:p>
-            <a:pPr indent="0" marL="0">
+            <a:pPr marL="0" indent="0">
               <a:buNone/>
             </a:pPr>
             <a:r>
@@ -5357,6 +5408,13 @@
           </a:solidFill>
           <a:ln/>
         </p:spPr>
+        <p:txBody>
+          <a:bodyPr/>
+          <a:lstStyle/>
+          <a:p>
+            <a:endParaRPr lang="pt-BR"/>
+          </a:p>
+        </p:txBody>
       </p:sp>
       <p:sp>
         <p:nvSpPr>
@@ -5379,7 +5437,7 @@
           <a:bodyPr wrap="square" lIns="0" tIns="0" rIns="0" bIns="0" rtlCol="0" anchor="ctr"/>
           <a:lstStyle/>
           <a:p>
-            <a:pPr indent="0" marL="0">
+            <a:pPr marL="0" indent="0">
               <a:buNone/>
             </a:pPr>
             <a:r>
@@ -5482,7 +5540,7 @@
           <a:bodyPr wrap="square" lIns="0" tIns="0" rIns="0" bIns="0" rtlCol="0" anchor="ctr"/>
           <a:lstStyle/>
           <a:p>
-            <a:pPr indent="0" marL="0">
+            <a:pPr marL="0" indent="0">
               <a:buNone/>
             </a:pPr>
             <a:r>
@@ -5521,7 +5579,7 @@
           <a:bodyPr wrap="square" lIns="0" tIns="0" rIns="0" bIns="0" rtlCol="0" anchor="ctr"/>
           <a:lstStyle/>
           <a:p>
-            <a:pPr algn="r" indent="0" marL="0">
+            <a:pPr marL="0" indent="0" algn="r">
               <a:buNone/>
             </a:pPr>
             <a:r>
@@ -5555,6 +5613,7 @@
         <a:solidFill>
           <a:srgbClr val="FFFFFF"/>
         </a:solidFill>
+        <a:effectLst/>
       </p:bgPr>
     </p:bg>
     <p:spTree>
@@ -5592,7 +5651,7 @@
           <a:bodyPr wrap="square" lIns="0" tIns="0" rIns="0" bIns="0" rtlCol="0" anchor="ctr"/>
           <a:lstStyle/>
           <a:p>
-            <a:pPr indent="0" marL="0">
+            <a:pPr marL="0" indent="0">
               <a:buNone/>
             </a:pPr>
             <a:r>
@@ -5636,6 +5695,13 @@
             <a:prstDash val="solid"/>
           </a:ln>
         </p:spPr>
+        <p:txBody>
+          <a:bodyPr/>
+          <a:lstStyle/>
+          <a:p>
+            <a:endParaRPr lang="pt-BR"/>
+          </a:p>
+        </p:txBody>
       </p:sp>
       <p:sp>
         <p:nvSpPr>
@@ -5656,6 +5722,13 @@
           </a:solidFill>
           <a:ln/>
         </p:spPr>
+        <p:txBody>
+          <a:bodyPr/>
+          <a:lstStyle/>
+          <a:p>
+            <a:endParaRPr lang="pt-BR"/>
+          </a:p>
+        </p:txBody>
       </p:sp>
       <p:sp>
         <p:nvSpPr>
@@ -5678,7 +5751,7 @@
           <a:bodyPr wrap="square" lIns="0" tIns="0" rIns="0" bIns="0" rtlCol="0" anchor="ctr"/>
           <a:lstStyle/>
           <a:p>
-            <a:pPr algn="ctr" indent="0" marL="0">
+            <a:pPr marL="0" indent="0" algn="ctr">
               <a:buNone/>
             </a:pPr>
             <a:r>
@@ -5717,7 +5790,7 @@
           <a:bodyPr wrap="square" lIns="0" tIns="0" rIns="0" bIns="0" rtlCol="0" anchor="ctr"/>
           <a:lstStyle/>
           <a:p>
-            <a:pPr algn="ctr" indent="0" marL="0">
+            <a:pPr marL="0" indent="0" algn="ctr">
               <a:buNone/>
             </a:pPr>
             <a:r>
@@ -5756,7 +5829,7 @@
           <a:bodyPr wrap="square" lIns="0" tIns="0" rIns="0" bIns="0" rtlCol="0" anchor="ctr"/>
           <a:lstStyle/>
           <a:p>
-            <a:pPr algn="ctr" indent="0" marL="0">
+            <a:pPr marL="0" indent="0" algn="ctr">
               <a:buNone/>
             </a:pPr>
             <a:r>
@@ -5795,6 +5868,13 @@
           </a:solidFill>
           <a:ln/>
         </p:spPr>
+        <p:txBody>
+          <a:bodyPr/>
+          <a:lstStyle/>
+          <a:p>
+            <a:endParaRPr lang="pt-BR"/>
+          </a:p>
+        </p:txBody>
       </p:sp>
       <p:sp>
         <p:nvSpPr>
@@ -5817,7 +5897,7 @@
           <a:bodyPr wrap="square" lIns="0" tIns="0" rIns="0" bIns="0" rtlCol="0" anchor="ctr"/>
           <a:lstStyle/>
           <a:p>
-            <a:pPr algn="ctr" indent="0" marL="0">
+            <a:pPr marL="0" indent="0" algn="ctr">
               <a:buNone/>
             </a:pPr>
             <a:r>
@@ -5829,7 +5909,18 @@
                 <a:ea typeface="Calibri" pitchFamily="34" charset="-122"/>
                 <a:cs typeface="Calibri" pitchFamily="34" charset="-120"/>
               </a:rPr>
-              <a:t>Participação no FIAP NEXT 2026 (24/10, ARCA Spaces, São Paulo): [SIM / NÃO — preencher]</a:t>
+              <a:t>Participação no FIAP NEXT 2026 (24/10, ARCA Spaces, São Paulo): </a:t>
+            </a:r>
+            <a:r>
+              <a:rPr lang="en-US" sz="1400" b="1" dirty="0" err="1">
+                <a:solidFill>
+                  <a:srgbClr val="FFFFFF"/>
+                </a:solidFill>
+                <a:latin typeface="Calibri" pitchFamily="34" charset="0"/>
+                <a:ea typeface="Calibri" pitchFamily="34" charset="-122"/>
+                <a:cs typeface="Calibri" pitchFamily="34" charset="-120"/>
+              </a:rPr>
+              <a:t>Não</a:t>
             </a:r>
             <a:endParaRPr lang="en-US" sz="1400" dirty="0"/>
           </a:p>
@@ -5856,7 +5947,7 @@
           <a:bodyPr wrap="square" lIns="0" tIns="0" rIns="0" bIns="0" rtlCol="0" anchor="ctr"/>
           <a:lstStyle/>
           <a:p>
-            <a:pPr indent="0" marL="0">
+            <a:pPr marL="0" indent="0">
               <a:buNone/>
             </a:pPr>
             <a:r>
@@ -5895,7 +5986,7 @@
           <a:bodyPr wrap="square" lIns="0" tIns="0" rIns="0" bIns="0" rtlCol="0" anchor="ctr"/>
           <a:lstStyle/>
           <a:p>
-            <a:pPr algn="r" indent="0" marL="0">
+            <a:pPr marL="0" indent="0" algn="r">
               <a:buNone/>
             </a:pPr>
             <a:r>
@@ -5913,6 +6004,36 @@
           </a:p>
         </p:txBody>
       </p:sp>
+      <p:pic>
+        <p:nvPicPr>
+          <p:cNvPr id="12" name="Imagem 11">
+            <a:extLst>
+              <a:ext uri="{FF2B5EF4-FFF2-40B4-BE49-F238E27FC236}">
+                <a16:creationId xmlns:a16="http://schemas.microsoft.com/office/drawing/2014/main" id="{C4747763-36B1-784C-21E8-AA254F81109D}"/>
+              </a:ext>
+            </a:extLst>
+          </p:cNvPr>
+          <p:cNvPicPr>
+            <a:picLocks noChangeAspect="1"/>
+          </p:cNvPicPr>
+          <p:nvPr/>
+        </p:nvPicPr>
+        <p:blipFill>
+          <a:blip r:embed="rId3"/>
+          <a:stretch>
+            <a:fillRect/>
+          </a:stretch>
+        </p:blipFill>
+        <p:spPr>
+          <a:xfrm>
+            <a:off x="5208149" y="2148840"/>
+            <a:ext cx="1772653" cy="1772653"/>
+          </a:xfrm>
+          <a:prstGeom prst="rect">
+            <a:avLst/>
+          </a:prstGeom>
+        </p:spPr>
+      </p:pic>
     </p:spTree>
   </p:cSld>
   <p:clrMapOvr>
@@ -6214,4 +6335,319 @@
     </a:ext>
   </a:extLst>
 </a:theme>
+</file>
+
+<file path=ppt/theme/theme2.xml><?xml version="1.0" encoding="utf-8"?>
+<a:theme xmlns:a="http://schemas.openxmlformats.org/drawingml/2006/main" name="Tema do Office">
+  <a:themeElements>
+    <a:clrScheme name="Office">
+      <a:dk1>
+        <a:sysClr val="windowText" lastClr="000000"/>
+      </a:dk1>
+      <a:lt1>
+        <a:sysClr val="window" lastClr="FFFFFF"/>
+      </a:lt1>
+      <a:dk2>
+        <a:srgbClr val="0E2841"/>
+      </a:dk2>
+      <a:lt2>
+        <a:srgbClr val="E8E8E8"/>
+      </a:lt2>
+      <a:accent1>
+        <a:srgbClr val="156082"/>
+      </a:accent1>
+      <a:accent2>
+        <a:srgbClr val="E97132"/>
+      </a:accent2>
+      <a:accent3>
+        <a:srgbClr val="196B24"/>
+      </a:accent3>
+      <a:accent4>
+        <a:srgbClr val="0F9ED5"/>
+      </a:accent4>
+      <a:accent5>
+        <a:srgbClr val="A02B93"/>
+      </a:accent5>
+      <a:accent6>
+        <a:srgbClr val="4EA72E"/>
+      </a:accent6>
+      <a:hlink>
+        <a:srgbClr val="467886"/>
+      </a:hlink>
+      <a:folHlink>
+        <a:srgbClr val="96607D"/>
+      </a:folHlink>
+    </a:clrScheme>
+    <a:fontScheme name="Office">
+      <a:majorFont>
+        <a:latin typeface="Aptos Display" panose="02110004020202020204"/>
+        <a:ea typeface=""/>
+        <a:cs typeface=""/>
+        <a:font script="Jpan" typeface="游ゴシック Light"/>
+        <a:font script="Hang" typeface="맑은 고딕"/>
+        <a:font script="Hans" typeface="等线 Light"/>
+        <a:font script="Hant" typeface="新細明體"/>
+        <a:font script="Arab" typeface="Times New Roman"/>
+        <a:font script="Hebr" typeface="Times New Roman"/>
+        <a:font script="Thai" typeface="Angsana New"/>
+        <a:font script="Ethi" typeface="Nyala"/>
+        <a:font script="Beng" typeface="Vrinda"/>
+        <a:font script="Gujr" typeface="Shruti"/>
+        <a:font script="Khmr" typeface="MoolBoran"/>
+        <a:font script="Knda" typeface="Tunga"/>
+        <a:font script="Guru" typeface="Raavi"/>
+        <a:font script="Cans" typeface="Euphemia"/>
+        <a:font script="Cher" typeface="Plantagenet Cherokee"/>
+        <a:font script="Yiii" typeface="Microsoft Yi Baiti"/>
+        <a:font script="Tibt" typeface="Microsoft Himalaya"/>
+        <a:font script="Thaa" typeface="MV Boli"/>
+        <a:font script="Deva" typeface="Mangal"/>
+        <a:font script="Telu" typeface="Gautami"/>
+        <a:font script="Taml" typeface="Latha"/>
+        <a:font script="Syrc" typeface="Estrangelo Edessa"/>
+        <a:font script="Orya" typeface="Kalinga"/>
+        <a:font script="Mlym" typeface="Kartika"/>
+        <a:font script="Laoo" typeface="DokChampa"/>
+        <a:font script="Sinh" typeface="Iskoola Pota"/>
+        <a:font script="Mong" typeface="Mongolian Baiti"/>
+        <a:font script="Viet" typeface="Times New Roman"/>
+        <a:font script="Uigh" typeface="Microsoft Uighur"/>
+        <a:font script="Geor" typeface="Sylfaen"/>
+        <a:font script="Armn" typeface="Arial"/>
+        <a:font script="Bugi" typeface="Leelawadee UI"/>
+        <a:font script="Bopo" typeface="Microsoft JhengHei"/>
+        <a:font script="Java" typeface="Javanese Text"/>
+        <a:font script="Lisu" typeface="Segoe UI"/>
+        <a:font script="Mymr" typeface="Myanmar Text"/>
+        <a:font script="Nkoo" typeface="Ebrima"/>
+        <a:font script="Olck" typeface="Nirmala UI"/>
+        <a:font script="Osma" typeface="Ebrima"/>
+        <a:font script="Phag" typeface="Phagspa"/>
+        <a:font script="Syrn" typeface="Estrangelo Edessa"/>
+        <a:font script="Syrj" typeface="Estrangelo Edessa"/>
+        <a:font script="Syre" typeface="Estrangelo Edessa"/>
+        <a:font script="Sora" typeface="Nirmala UI"/>
+        <a:font script="Tale" typeface="Microsoft Tai Le"/>
+        <a:font script="Talu" typeface="Microsoft New Tai Lue"/>
+        <a:font script="Tfng" typeface="Ebrima"/>
+      </a:majorFont>
+      <a:minorFont>
+        <a:latin typeface="Aptos" panose="02110004020202020204"/>
+        <a:ea typeface=""/>
+        <a:cs typeface=""/>
+        <a:font script="Jpan" typeface="游ゴシック"/>
+        <a:font script="Hang" typeface="맑은 고딕"/>
+        <a:font script="Hans" typeface="等线"/>
+        <a:font script="Hant" typeface="新細明體"/>
+        <a:font script="Arab" typeface="Arial"/>
+        <a:font script="Hebr" typeface="Arial"/>
+        <a:font script="Thai" typeface="Cordia New"/>
+        <a:font script="Ethi" typeface="Nyala"/>
+        <a:font script="Beng" typeface="Vrinda"/>
+        <a:font script="Gujr" typeface="Shruti"/>
+        <a:font script="Khmr" typeface="DaunPenh"/>
+        <a:font script="Knda" typeface="Tunga"/>
+        <a:font script="Guru" typeface="Raavi"/>
+        <a:font script="Cans" typeface="Euphemia"/>
+        <a:font script="Cher" typeface="Plantagenet Cherokee"/>
+        <a:font script="Yiii" typeface="Microsoft Yi Baiti"/>
+        <a:font script="Tibt" typeface="Microsoft Himalaya"/>
+        <a:font script="Thaa" typeface="MV Boli"/>
+        <a:font script="Deva" typeface="Mangal"/>
+        <a:font script="Telu" typeface="Gautami"/>
+        <a:font script="Taml" typeface="Latha"/>
+        <a:font script="Syrc" typeface="Estrangelo Edessa"/>
+        <a:font script="Orya" typeface="Kalinga"/>
+        <a:font script="Mlym" typeface="Kartika"/>
+        <a:font script="Laoo" typeface="DokChampa"/>
+        <a:font script="Sinh" typeface="Iskoola Pota"/>
+        <a:font script="Mong" typeface="Mongolian Baiti"/>
+        <a:font script="Viet" typeface="Arial"/>
+        <a:font script="Uigh" typeface="Microsoft Uighur"/>
+        <a:font script="Geor" typeface="Sylfaen"/>
+        <a:font script="Armn" typeface="Arial"/>
+        <a:font script="Bugi" typeface="Leelawadee UI"/>
+        <a:font script="Bopo" typeface="Microsoft JhengHei"/>
+        <a:font script="Java" typeface="Javanese Text"/>
+        <a:font script="Lisu" typeface="Segoe UI"/>
+        <a:font script="Mymr" typeface="Myanmar Text"/>
+        <a:font script="Nkoo" typeface="Ebrima"/>
+        <a:font script="Olck" typeface="Nirmala UI"/>
+        <a:font script="Osma" typeface="Ebrima"/>
+        <a:font script="Phag" typeface="Phagspa"/>
+        <a:font script="Syrn" typeface="Estrangelo Edessa"/>
+        <a:font script="Syrj" typeface="Estrangelo Edessa"/>
+        <a:font script="Syre" typeface="Estrangelo Edessa"/>
+        <a:font script="Sora" typeface="Nirmala UI"/>
+        <a:font script="Tale" typeface="Microsoft Tai Le"/>
+        <a:font script="Talu" typeface="Microsoft New Tai Lue"/>
+        <a:font script="Tfng" typeface="Ebrima"/>
+      </a:minorFont>
+    </a:fontScheme>
+    <a:fmtScheme name="Office">
+      <a:fillStyleLst>
+        <a:solidFill>
+          <a:schemeClr val="phClr"/>
+        </a:solidFill>
+        <a:gradFill rotWithShape="1">
+          <a:gsLst>
+            <a:gs pos="0">
+              <a:schemeClr val="phClr">
+                <a:lumMod val="110000"/>
+                <a:satMod val="105000"/>
+                <a:tint val="67000"/>
+              </a:schemeClr>
+            </a:gs>
+            <a:gs pos="50000">
+              <a:schemeClr val="phClr">
+                <a:lumMod val="105000"/>
+                <a:satMod val="103000"/>
+                <a:tint val="73000"/>
+              </a:schemeClr>
+            </a:gs>
+            <a:gs pos="100000">
+              <a:schemeClr val="phClr">
+                <a:lumMod val="105000"/>
+                <a:satMod val="109000"/>
+                <a:tint val="81000"/>
+              </a:schemeClr>
+            </a:gs>
+          </a:gsLst>
+          <a:lin ang="5400000" scaled="0"/>
+        </a:gradFill>
+        <a:gradFill rotWithShape="1">
+          <a:gsLst>
+            <a:gs pos="0">
+              <a:schemeClr val="phClr">
+                <a:satMod val="103000"/>
+                <a:lumMod val="102000"/>
+                <a:tint val="94000"/>
+              </a:schemeClr>
+            </a:gs>
+            <a:gs pos="50000">
+              <a:schemeClr val="phClr">
+                <a:satMod val="110000"/>
+                <a:lumMod val="100000"/>
+                <a:shade val="100000"/>
+              </a:schemeClr>
+            </a:gs>
+            <a:gs pos="100000">
+              <a:schemeClr val="phClr">
+                <a:lumMod val="99000"/>
+                <a:satMod val="120000"/>
+                <a:shade val="78000"/>
+              </a:schemeClr>
+            </a:gs>
+          </a:gsLst>
+          <a:lin ang="5400000" scaled="0"/>
+        </a:gradFill>
+      </a:fillStyleLst>
+      <a:lnStyleLst>
+        <a:ln w="12700" cap="flat" cmpd="sng" algn="ctr">
+          <a:solidFill>
+            <a:schemeClr val="phClr"/>
+          </a:solidFill>
+          <a:prstDash val="solid"/>
+          <a:miter lim="800000"/>
+        </a:ln>
+        <a:ln w="19050" cap="flat" cmpd="sng" algn="ctr">
+          <a:solidFill>
+            <a:schemeClr val="phClr"/>
+          </a:solidFill>
+          <a:prstDash val="solid"/>
+          <a:miter lim="800000"/>
+        </a:ln>
+        <a:ln w="25400" cap="flat" cmpd="sng" algn="ctr">
+          <a:solidFill>
+            <a:schemeClr val="phClr"/>
+          </a:solidFill>
+          <a:prstDash val="solid"/>
+          <a:miter lim="800000"/>
+        </a:ln>
+      </a:lnStyleLst>
+      <a:effectStyleLst>
+        <a:effectStyle>
+          <a:effectLst/>
+        </a:effectStyle>
+        <a:effectStyle>
+          <a:effectLst/>
+        </a:effectStyle>
+        <a:effectStyle>
+          <a:effectLst>
+            <a:outerShdw blurRad="57150" dist="19050" dir="5400000" algn="ctr" rotWithShape="0">
+              <a:srgbClr val="000000">
+                <a:alpha val="63000"/>
+              </a:srgbClr>
+            </a:outerShdw>
+          </a:effectLst>
+        </a:effectStyle>
+      </a:effectStyleLst>
+      <a:bgFillStyleLst>
+        <a:solidFill>
+          <a:schemeClr val="phClr"/>
+        </a:solidFill>
+        <a:solidFill>
+          <a:schemeClr val="phClr">
+            <a:tint val="95000"/>
+            <a:satMod val="170000"/>
+          </a:schemeClr>
+        </a:solidFill>
+        <a:gradFill rotWithShape="1">
+          <a:gsLst>
+            <a:gs pos="0">
+              <a:schemeClr val="phClr">
+                <a:tint val="93000"/>
+                <a:satMod val="150000"/>
+                <a:shade val="98000"/>
+                <a:lumMod val="102000"/>
+              </a:schemeClr>
+            </a:gs>
+            <a:gs pos="50000">
+              <a:schemeClr val="phClr">
+                <a:tint val="98000"/>
+                <a:satMod val="130000"/>
+                <a:shade val="90000"/>
+                <a:lumMod val="103000"/>
+              </a:schemeClr>
+            </a:gs>
+            <a:gs pos="100000">
+              <a:schemeClr val="phClr">
+                <a:shade val="63000"/>
+                <a:satMod val="120000"/>
+              </a:schemeClr>
+            </a:gs>
+          </a:gsLst>
+          <a:lin ang="5400000" scaled="0"/>
+        </a:gradFill>
+      </a:bgFillStyleLst>
+    </a:fmtScheme>
+  </a:themeElements>
+  <a:objectDefaults>
+    <a:lnDef>
+      <a:spPr/>
+      <a:bodyPr/>
+      <a:lstStyle/>
+      <a:style>
+        <a:lnRef idx="2">
+          <a:schemeClr val="accent1"/>
+        </a:lnRef>
+        <a:fillRef idx="0">
+          <a:schemeClr val="accent1"/>
+        </a:fillRef>
+        <a:effectRef idx="1">
+          <a:schemeClr val="accent1"/>
+        </a:effectRef>
+        <a:fontRef idx="minor">
+          <a:schemeClr val="tx1"/>
+        </a:fontRef>
+      </a:style>
+    </a:lnDef>
+  </a:objectDefaults>
+  <a:extraClrSchemeLst/>
+  <a:extLst>
+    <a:ext uri="{05A4C25C-085E-4340-85A3-A5531E510DB2}">
+      <thm15:themeFamily xmlns:thm15="http://schemas.microsoft.com/office/thememl/2012/main" name="Office Theme" id="{2E142A2C-CD16-42D6-873A-C26D2A0506FA}" vid="{1BDDFF52-6CD6-40A5-AB3C-68EB2F1E4D0A}"/>
+    </a:ext>
+  </a:extLst>
+</a:theme>
 </file>